--- a/Development_D5/D5-L12_Review_and_Unit_Assessment_Hobbies_Sport_Leisure.pptx
+++ b/Development_D5/D5-L12_Review_and_Unit_Assessment_Hobbies_Sport_Leisure.pptx
@@ -626,7 +626,11 @@
           <a:lstStyle/>
           <a:p>
             <a:r>
-              <a:rPr lang="en-US" dirty="0"/>
+              <a:rPr lang="ar-SA" dirty="0">
+                <a:latin typeface="Amiri" pitchFamily="2" charset="-78"/>
+                <a:ea typeface="Amiri" pitchFamily="2" charset="-78"/>
+                <a:cs typeface="Amiri" pitchFamily="2" charset="-78"/>
+              </a:rPr>
               <a:t>LISTENING TEXT 1 · QUESTIONS 5–8 (website Part A, 20 marks). Website: “Read the questions first, decide which tense each one targets.” Each recording may be played twice; students answer after the second reading.
 SCRIPT: فِي الطُّفُولَةِ كُنْتُ أَلْعَبُ كُرَةَ الطَّائِرَةِ فِي نَادِي الحَيِّ، وَكَانَ مُدَرِّبِي يُشَجِّعُنِي كَثِيرًا. أَمَّا الآنَ فَأَتَدَرَّبُ عَادَةً ثَلَاثَ مَرَّاتٍ فِي الأُسْبُوعِ. وَفِي العَامِ المَاضِي فُزْتُ بِالمِيدَالِيَةِ البُرُونْزِيَّةِ فِي بُطُولَةِ المَدَارِسِ، وَكَانَ ذٰلِكَ أَجْمَلَ إِنْجَازٍ لِي. وَالشَّهْرَ القَادِمَ سَأُشَارِكُ فِي بُطُولَةٍ إِقْلِيمِيَّةٍ. فِي رَأْيِي الرِّيَاضَةُ تُعَلِّمُ الصَّبْرَ. وَالأُسْبُوعَ المَاضِيَ حَضَرْتُ حَفْلَةً مُوسِيقِيَّةً تُرَاثِيَّةً مَعَ أُسْرَتِي، وَأُعْجِبْتُ بِعَازِفِ العُودِ لِأَنَّهُ مُتَوَاضِعٌ وَمُجْتَهِدٌ.
 Private chat: 4 letters.</a:t>
@@ -804,7 +808,11 @@
           <a:lstStyle/>
           <a:p>
             <a:r>
-              <a:rPr lang="en-US" dirty="0"/>
+              <a:rPr lang="ar-SA" dirty="0">
+                <a:latin typeface="Amiri" pitchFamily="2" charset="-78"/>
+                <a:ea typeface="Amiri" pitchFamily="2" charset="-78"/>
+                <a:cs typeface="Amiri" pitchFamily="2" charset="-78"/>
+              </a:rPr>
               <a:t>LISTENING TEXT 2 · 6 QUESTIONS (website Part A, 20 marks). Website: “Read the questions first, decide which tense each one targets.” Each recording may be played twice; students answer after the second reading.
 SCRIPT: سَامِي: فِي الصَّيْفِ المَاضِي سَافَرْتُ إِلَى مَدِينَةٍ سَاحِلِيَّةٍ وَأَقَمْتُ فِي فُنْدُقٍ صَغِيرٍ. لَيْلَى: وَأَنَا حَجَزْتُ رِحْلَةً جَبَلِيَّةً، وَمَشَيْنَا سَاعَتَيْنِ حَتَّى وَصَلْنَا إِلَى القِمَّةِ. سَامِي: اسْتَمْتَعْتُ بِالشَّاطِئِ كَثِيرًا، وَاكْتَشَفْتُ سُوقًا قَدِيمًا. لَيْلَى: أَنَا أَيْضًا اسْتَمْتَعْتُ بِالرِّحْلَةِ، وَلٰكِنْ لِلْأَسَفِ نَسِيتُ الكَامِيرَا فِي الفُنْدُقِ. سَامِي: وَأَنَا نَسِيتُ حَقِيبَتِي فِي المَحَطَّةِ! لِحُسْنِ الحَظِّ وَجَدْتُهَا. لَيْلَى: فِي المُسْتَقْبَلِ سَأَعُودُ إِلَى الجَبَلِ مَرَّةً أُخْرَى. سَامِي: وَأَنَا سَأَعُودُ إِلَى الشَّاطِئِ.
 Private chat: 6 letters.</a:t>
@@ -982,7 +990,11 @@
           <a:lstStyle/>
           <a:p>
             <a:r>
-              <a:rPr lang="en-US" dirty="0"/>
+              <a:rPr lang="ar-SA" dirty="0">
+                <a:latin typeface="Amiri" pitchFamily="2" charset="-78"/>
+                <a:ea typeface="Amiri" pitchFamily="2" charset="-78"/>
+                <a:cs typeface="Amiri" pitchFamily="2" charset="-78"/>
+              </a:rPr>
               <a:t>LISTENING TEXT 3 · 6 QUESTIONS (website Part A, 20 marks). Website: “Read the questions first, decide which tense each one targets.” Each recording may be played twice; students answer after the second reading.
 SCRIPT: فِي الأُسْبُوعِ المَاضِي نَظَّمَ المَرْكَزُ الثَّقَافِيُّ أُمْسِيَةً مُوسِيقِيَّةً. عَزَفَتْ فِرْقَةٌ صَغِيرَةٌ عَلَى العُودِ وَالنَّايِ وَالقَانُونِ، وَعَبَّرَتِ المُوسِيقَى عَنْ تُرَاثٍ طَوِيلٍ. حَضَرَ أَكْثَرُ مِنْ مِئَتَيْ شَخْصٍ، وَأَثَّرَتِ الأُمْسِيَةُ فِي الجُمْهُورِ كَثِيرًا. وَبَعْدَ الحَفْلَةِ افْتَتَحَ المَرْكَزُ مَعْرِضًا لِلْخَطِّ العَرَبِيِّ، وَأَلْهَمَتِ الزَّخْرَفَةُ عَدَدًا مِنَ الطُّلَّابِ. وَفِي بَعْضِ المَدَارِسِ يَتَعَلَّمُ الأَطْفَالُ هٰذِهِ الآلَاتِ، وَلٰكِنْ لَيْسَ دَائِمًا؛ فَالأَذْوَاقُ تَخْتَلِفُ.
 Private chat: 6 letters.</a:t>
@@ -1512,7 +1524,11 @@
           <a:lstStyle/>
           <a:p>
             <a:r>
-              <a:rPr lang="en-US" dirty="0"/>
+              <a:rPr lang="ar-SA" dirty="0">
+                <a:latin typeface="Amiri" pitchFamily="2" charset="-78"/>
+                <a:ea typeface="Amiri" pitchFamily="2" charset="-78"/>
+                <a:cs typeface="Amiri" pitchFamily="2" charset="-78"/>
+              </a:rPr>
               <a:t>WELCOME (1 min) — while students join.
 • Greet each student by name as they arrive: السَّلَامُ عَلَيْكُمْ. Take the register (Pastoral Tracker: attendance 0/1).
 • 2-MINUTE CHECK-IN (SEND training): a private chat to any student who seemed unsettled last lesson — “Are you okay today? 👍 / 👎”.
@@ -1693,7 +1709,11 @@
           <a:lstStyle/>
           <a:p>
             <a:r>
-              <a:rPr lang="en-US" dirty="0"/>
+              <a:rPr lang="ar-SA" dirty="0">
+                <a:latin typeface="Amiri" pitchFamily="2" charset="-78"/>
+                <a:ea typeface="Amiri" pitchFamily="2" charset="-78"/>
+                <a:cs typeface="Amiri" pitchFamily="2" charset="-78"/>
+              </a:rPr>
               <a:t>WRITING QUESTION 1 (website, 5 marks): one mark per field completed accurately in Arabic (a phrase is enough; the collocation verb, the hollow stem أَقَمْتُ and the suffix must be correct for the mark).</a:t>
             </a:r>
             <a:endParaRPr lang="en-US" dirty="0"/>
@@ -1869,7 +1889,11 @@
           <a:lstStyle/>
           <a:p>
             <a:r>
-              <a:rPr lang="en-US" dirty="0"/>
+              <a:rPr lang="ar-SA" dirty="0">
+                <a:latin typeface="Amiri" pitchFamily="2" charset="-78"/>
+                <a:ea typeface="Amiri" pitchFamily="2" charset="-78"/>
+                <a:cs typeface="Amiri" pitchFamily="2" charset="-78"/>
+              </a:rPr>
               <a:t>ROLE PLAY (website, 4 marks). Teacher plays the receptionist: أَهْلًا وَسَهْلًا فِي المَرْكَزِ. كَيْفَ أُسَاعِدُكَ؟ Answers to model: عِنْدَنَا سِبَاحَةٌ وَكُرَةُ سَلَّةٍ وَيُوغَا. · نَفْتَحُ مِنَ التَّاسِعَةِ صَبَاحًا إِلَى التَّاسِعَةِ مَسَاءً. Then listen for prompt 3 (e.g. فِي المَرَّةِ المَاضِيَةِ سَبَحْتُ وَلَعِبْتُ …) and prompt 4 (سَأَتَدَرَّبُ / أَنْوِي أَنْ …). To a girl: فَعَلْتِ · تَنْوِينَ.</a:t>
             </a:r>
             <a:endParaRPr lang="en-US" dirty="0"/>
@@ -1957,7 +1981,11 @@
           <a:lstStyle/>
           <a:p>
             <a:r>
-              <a:rPr lang="en-US" dirty="0"/>
+              <a:rPr lang="ar-SA" dirty="0">
+                <a:latin typeface="Amiri" pitchFamily="2" charset="-78"/>
+                <a:ea typeface="Amiri" pitchFamily="2" charset="-78"/>
+                <a:cs typeface="Amiri" pitchFamily="2" charset="-78"/>
+              </a:rPr>
               <a:t>TOPIC CONVERSATION (website, 6 marks): mirror the tense of each question (D5-L11). Allow time-buying phrases (دَعْنِي أُفَكِّرُ). To a girl: هِوَايَتُكِ · بَدَأْتِ · مَرَرْتِ · خُطَطُكِ. ORGANISATION: one-to-one while others finish writing, or trusted pairs with the teacher as examiner.</a:t>
             </a:r>
             <a:endParaRPr lang="en-US" dirty="0"/>
@@ -2671,7 +2699,11 @@
           <a:lstStyle/>
           <a:p>
             <a:r>
-              <a:rPr lang="en-US" dirty="0"/>
+              <a:rPr lang="ar-SA" dirty="0">
+                <a:latin typeface="Amiri" pitchFamily="2" charset="-78"/>
+                <a:ea typeface="Amiri" pitchFamily="2" charset="-78"/>
+                <a:cs typeface="Amiri" pitchFamily="2" charset="-78"/>
+              </a:rPr>
               <a:t>REVIEW (website twelve-question grammar spine, correct answers): لَعِبْتُ · رَسَمَتْ · ذَهَبُوا · شَاهَدْنَا · قُلْنَا · زُرْتُ · مَشَيْنَا · كَانَ الطَّقْسُ جَمِيلًا · كَانَتْ تُشَاهِدُ · أُمَارِسُ السِّبَاحَةَ مَرَّتَيْنِ · فَازَ … بِـ / أُعْجِبْتُ بِـ · فَجْأَةً بَدَأَ … سَأَعُودُ. Close the vocabulary vault during each section.</a:t>
             </a:r>
             <a:endParaRPr lang="en-US" dirty="0"/>
@@ -2847,7 +2879,11 @@
           <a:lstStyle/>
           <a:p>
             <a:r>
-              <a:rPr lang="en-US" dirty="0"/>
+              <a:rPr lang="ar-SA" dirty="0">
+                <a:latin typeface="Amiri" pitchFamily="2" charset="-78"/>
+                <a:ea typeface="Amiri" pitchFamily="2" charset="-78"/>
+                <a:cs typeface="Amiri" pitchFamily="2" charset="-78"/>
+              </a:rPr>
               <a:t>LISTENING TEXT 1 · QUESTIONS 1–4 (website Part A, 20 marks). Website: “Read the questions first, decide which tense each one targets.” Each recording may be played twice; students answer after the second reading.
 SCRIPT: فِي الطُّفُولَةِ كُنْتُ أَلْعَبُ كُرَةَ الطَّائِرَةِ فِي نَادِي الحَيِّ، وَكَانَ مُدَرِّبِي يُشَجِّعُنِي كَثِيرًا. أَمَّا الآنَ فَأَتَدَرَّبُ عَادَةً ثَلَاثَ مَرَّاتٍ فِي الأُسْبُوعِ. وَفِي العَامِ المَاضِي فُزْتُ بِالمِيدَالِيَةِ البُرُونْزِيَّةِ فِي بُطُولَةِ المَدَارِسِ، وَكَانَ ذٰلِكَ أَجْمَلَ إِنْجَازٍ لِي. وَالشَّهْرَ القَادِمَ سَأُشَارِكُ فِي بُطُولَةٍ إِقْلِيمِيَّةٍ. فِي رَأْيِي الرِّيَاضَةُ تُعَلِّمُ الصَّبْرَ. وَالأُسْبُوعَ المَاضِيَ حَضَرْتُ حَفْلَةً مُوسِيقِيَّةً تُرَاثِيَّةً مَعَ أُسْرَتِي، وَأُعْجِبْتُ بِعَازِفِ العُودِ لِأَنَّهُ مُتَوَاضِعٌ وَمُجْتَهِدٌ.
 Private chat: 4 letters.</a:t>
@@ -3421,6 +3457,7 @@
                   <a:srgbClr val="D4AF37"/>
                 </a:solidFill>
                 <a:latin typeface="Amiri" pitchFamily="2" charset="-78"/>
+                <a:ea typeface="Amiri" pitchFamily="2" charset="-78"/>
                 <a:cs typeface="Amiri" pitchFamily="2" charset="-78"/>
               </a:rPr>
               <a:t>م</a:t>
@@ -3627,6 +3664,7 @@
                   <a:srgbClr val="D4AF37"/>
                 </a:solidFill>
                 <a:latin typeface="Amiri" pitchFamily="2" charset="-78"/>
+                <a:ea typeface="Amiri" pitchFamily="2" charset="-78"/>
                 <a:cs typeface="Amiri" pitchFamily="2" charset="-78"/>
               </a:rPr>
               <a:t>المُرَاجَعَةُ وَتَقْيِيمُ الوَحْدَةِ</a:t>
@@ -4084,6 +4122,7 @@
                   <a:srgbClr val="D4AF37"/>
                 </a:solidFill>
                 <a:latin typeface="Amiri" pitchFamily="2" charset="-78"/>
+                <a:ea typeface="Amiri" pitchFamily="2" charset="-78"/>
                 <a:cs typeface="Amiri" pitchFamily="2" charset="-78"/>
               </a:rPr>
               <a:t>م</a:t>
@@ -4404,6 +4443,7 @@
                   <a:srgbClr val="8A6D1E"/>
                 </a:solidFill>
                 <a:latin typeface="Amiri" pitchFamily="2" charset="-78"/>
+                <a:ea typeface="Amiri" pitchFamily="2" charset="-78"/>
                 <a:cs typeface="Amiri" pitchFamily="2" charset="-78"/>
               </a:rPr>
               <a:t>الاِسْتِمَاعُ</a:t>
@@ -6327,6 +6367,7 @@
                   <a:srgbClr val="D4AF37"/>
                 </a:solidFill>
                 <a:latin typeface="Amiri" pitchFamily="2" charset="-78"/>
+                <a:ea typeface="Amiri" pitchFamily="2" charset="-78"/>
                 <a:cs typeface="Amiri" pitchFamily="2" charset="-78"/>
               </a:rPr>
               <a:t>م</a:t>
@@ -6647,6 +6688,7 @@
                   <a:srgbClr val="8A6D1E"/>
                 </a:solidFill>
                 <a:latin typeface="Amiri" pitchFamily="2" charset="-78"/>
+                <a:ea typeface="Amiri" pitchFamily="2" charset="-78"/>
                 <a:cs typeface="Amiri" pitchFamily="2" charset="-78"/>
               </a:rPr>
               <a:t>الإِجَابَاتُ</a:t>
@@ -7188,6 +7230,7 @@
                   <a:srgbClr val="8A6D1E"/>
                 </a:solidFill>
                 <a:latin typeface="Amiri" pitchFamily="2" charset="-78"/>
+                <a:ea typeface="Amiri" pitchFamily="2" charset="-78"/>
                 <a:cs typeface="Amiri" pitchFamily="2" charset="-78"/>
               </a:rPr>
               <a:t>فِي رَأْيِي الرِّيَاضَةُ تُعَلِّمُ الصَّبْرَ.</a:t>
@@ -7691,6 +7734,7 @@
                   <a:srgbClr val="8A6D1E"/>
                 </a:solidFill>
                 <a:latin typeface="Amiri" pitchFamily="2" charset="-78"/>
+                <a:ea typeface="Amiri" pitchFamily="2" charset="-78"/>
                 <a:cs typeface="Amiri" pitchFamily="2" charset="-78"/>
               </a:rPr>
               <a:t>وَالأُسْبُوعَ المَاضِيَ حَضَرْتُ حَفْلَةً مُوسِيقِيَّةً تُرَاثِيَّةً.</a:t>
@@ -8194,6 +8238,7 @@
                   <a:srgbClr val="8A6D1E"/>
                 </a:solidFill>
                 <a:latin typeface="Amiri" pitchFamily="2" charset="-78"/>
+                <a:ea typeface="Amiri" pitchFamily="2" charset="-78"/>
                 <a:cs typeface="Amiri" pitchFamily="2" charset="-78"/>
               </a:rPr>
               <a:t>أُعْجِبْتُ بِعَازِفِ العُودِ لِأَنَّهُ مُتَوَاضِعٌ وَمُجْتَهِدٌ.</a:t>
@@ -8697,6 +8742,7 @@
                   <a:srgbClr val="8A6D1E"/>
                 </a:solidFill>
                 <a:latin typeface="Amiri" pitchFamily="2" charset="-78"/>
+                <a:ea typeface="Amiri" pitchFamily="2" charset="-78"/>
                 <a:cs typeface="Amiri" pitchFamily="2" charset="-78"/>
               </a:rPr>
               <a:t>حَفْلَةً مُوسِيقِيَّةً تُرَاثِيَّةً</a:t>
@@ -8843,6 +8889,7 @@
                   <a:srgbClr val="D4AF37"/>
                 </a:solidFill>
                 <a:latin typeface="Amiri" pitchFamily="2" charset="-78"/>
+                <a:ea typeface="Amiri" pitchFamily="2" charset="-78"/>
                 <a:cs typeface="Amiri" pitchFamily="2" charset="-78"/>
               </a:rPr>
               <a:t>م</a:t>
@@ -9163,6 +9210,7 @@
                   <a:srgbClr val="8A6D1E"/>
                 </a:solidFill>
                 <a:latin typeface="Amiri" pitchFamily="2" charset="-78"/>
+                <a:ea typeface="Amiri" pitchFamily="2" charset="-78"/>
                 <a:cs typeface="Amiri" pitchFamily="2" charset="-78"/>
               </a:rPr>
               <a:t>الاِسْتِمَاعُ</a:t>
@@ -11962,6 +12010,7 @@
                   <a:srgbClr val="D4AF37"/>
                 </a:solidFill>
                 <a:latin typeface="Amiri" pitchFamily="2" charset="-78"/>
+                <a:ea typeface="Amiri" pitchFamily="2" charset="-78"/>
                 <a:cs typeface="Amiri" pitchFamily="2" charset="-78"/>
               </a:rPr>
               <a:t>م</a:t>
@@ -12282,6 +12331,7 @@
                   <a:srgbClr val="8A6D1E"/>
                 </a:solidFill>
                 <a:latin typeface="Amiri" pitchFamily="2" charset="-78"/>
+                <a:ea typeface="Amiri" pitchFamily="2" charset="-78"/>
                 <a:cs typeface="Amiri" pitchFamily="2" charset="-78"/>
               </a:rPr>
               <a:t>الإِجَابَاتُ</a:t>
@@ -12823,6 +12873,7 @@
                   <a:srgbClr val="8A6D1E"/>
                 </a:solidFill>
                 <a:latin typeface="Amiri" pitchFamily="2" charset="-78"/>
+                <a:ea typeface="Amiri" pitchFamily="2" charset="-78"/>
                 <a:cs typeface="Amiri" pitchFamily="2" charset="-78"/>
               </a:rPr>
               <a:t>سَامِي: أَقَمْتُ فِي فُنْدُقٍ صَغِيرٍ.</a:t>
@@ -13326,6 +13377,7 @@
                   <a:srgbClr val="8A6D1E"/>
                 </a:solidFill>
                 <a:latin typeface="Amiri" pitchFamily="2" charset="-78"/>
+                <a:ea typeface="Amiri" pitchFamily="2" charset="-78"/>
                 <a:cs typeface="Amiri" pitchFamily="2" charset="-78"/>
               </a:rPr>
               <a:t>لَيْلَى: حَجَزْتُ رِحْلَةً جَبَلِيَّةً.</a:t>
@@ -13829,6 +13881,7 @@
                   <a:srgbClr val="8A6D1E"/>
                 </a:solidFill>
                 <a:latin typeface="Amiri" pitchFamily="2" charset="-78"/>
+                <a:ea typeface="Amiri" pitchFamily="2" charset="-78"/>
                 <a:cs typeface="Amiri" pitchFamily="2" charset="-78"/>
               </a:rPr>
               <a:t>سَامِي: اكْتَشَفْتُ سُوقًا قَدِيمًا.</a:t>
@@ -14345,6 +14398,7 @@
                   <a:srgbClr val="8A6D1E"/>
                 </a:solidFill>
                 <a:latin typeface="Amiri" pitchFamily="2" charset="-78"/>
+                <a:ea typeface="Amiri" pitchFamily="2" charset="-78"/>
                 <a:cs typeface="Amiri" pitchFamily="2" charset="-78"/>
               </a:rPr>
               <a:t>اسْتَمْتَعْتُ بِالشَّاطِئِ</a:t>
@@ -14371,6 +14425,7 @@
                   <a:srgbClr val="8A6D1E"/>
                 </a:solidFill>
                 <a:latin typeface="Amiri" pitchFamily="2" charset="-78"/>
+                <a:ea typeface="Amiri" pitchFamily="2" charset="-78"/>
                 <a:cs typeface="Amiri" pitchFamily="2" charset="-78"/>
               </a:rPr>
               <a:t>اسْتَمْتَعْتُ بِالرِّحْلَةِ</a:t>
@@ -15403,6 +15458,7 @@
                   <a:srgbClr val="8A6D1E"/>
                 </a:solidFill>
                 <a:latin typeface="Amiri" pitchFamily="2" charset="-78"/>
+                <a:ea typeface="Amiri" pitchFamily="2" charset="-78"/>
                 <a:cs typeface="Amiri" pitchFamily="2" charset="-78"/>
               </a:rPr>
               <a:t>سَأَعُودُ</a:t>
@@ -15549,6 +15605,7 @@
                   <a:srgbClr val="D4AF37"/>
                 </a:solidFill>
                 <a:latin typeface="Amiri" pitchFamily="2" charset="-78"/>
+                <a:ea typeface="Amiri" pitchFamily="2" charset="-78"/>
                 <a:cs typeface="Amiri" pitchFamily="2" charset="-78"/>
               </a:rPr>
               <a:t>م</a:t>
@@ -15869,6 +15926,7 @@
                   <a:srgbClr val="8A6D1E"/>
                 </a:solidFill>
                 <a:latin typeface="Amiri" pitchFamily="2" charset="-78"/>
+                <a:ea typeface="Amiri" pitchFamily="2" charset="-78"/>
                 <a:cs typeface="Amiri" pitchFamily="2" charset="-78"/>
               </a:rPr>
               <a:t>الاِسْتِمَاعُ</a:t>
@@ -18668,6 +18726,7 @@
                   <a:srgbClr val="D4AF37"/>
                 </a:solidFill>
                 <a:latin typeface="Amiri" pitchFamily="2" charset="-78"/>
+                <a:ea typeface="Amiri" pitchFamily="2" charset="-78"/>
                 <a:cs typeface="Amiri" pitchFamily="2" charset="-78"/>
               </a:rPr>
               <a:t>م</a:t>
@@ -18988,6 +19047,7 @@
                   <a:srgbClr val="8A6D1E"/>
                 </a:solidFill>
                 <a:latin typeface="Amiri" pitchFamily="2" charset="-78"/>
+                <a:ea typeface="Amiri" pitchFamily="2" charset="-78"/>
                 <a:cs typeface="Amiri" pitchFamily="2" charset="-78"/>
               </a:rPr>
               <a:t>الإِجَابَاتُ</a:t>
@@ -19529,6 +19589,7 @@
                   <a:srgbClr val="8A6D1E"/>
                 </a:solidFill>
                 <a:latin typeface="Amiri" pitchFamily="2" charset="-78"/>
+                <a:ea typeface="Amiri" pitchFamily="2" charset="-78"/>
                 <a:cs typeface="Amiri" pitchFamily="2" charset="-78"/>
               </a:rPr>
               <a:t>عَزَفَتْ فِرْقَةٌ صَغِيرَةٌ عَلَى العُودِ وَالنَّايِ وَالقَانُونِ.</a:t>
@@ -20032,6 +20093,7 @@
                   <a:srgbClr val="8A6D1E"/>
                 </a:solidFill>
                 <a:latin typeface="Amiri" pitchFamily="2" charset="-78"/>
+                <a:ea typeface="Amiri" pitchFamily="2" charset="-78"/>
                 <a:cs typeface="Amiri" pitchFamily="2" charset="-78"/>
               </a:rPr>
               <a:t>حَضَرَ أَكْثَرُ مِنْ مِئَتَيْ شَخْصٍ.</a:t>
@@ -20535,6 +20597,7 @@
                   <a:srgbClr val="8A6D1E"/>
                 </a:solidFill>
                 <a:latin typeface="Amiri" pitchFamily="2" charset="-78"/>
+                <a:ea typeface="Amiri" pitchFamily="2" charset="-78"/>
                 <a:cs typeface="Amiri" pitchFamily="2" charset="-78"/>
               </a:rPr>
               <a:t>افْتَتَحَ المَرْكَزُ مَعْرِضًا لِلْخَطِّ العَرَبِيِّ.</a:t>
@@ -21038,6 +21101,7 @@
                   <a:srgbClr val="8A6D1E"/>
                 </a:solidFill>
                 <a:latin typeface="Amiri" pitchFamily="2" charset="-78"/>
+                <a:ea typeface="Amiri" pitchFamily="2" charset="-78"/>
                 <a:cs typeface="Amiri" pitchFamily="2" charset="-78"/>
               </a:rPr>
               <a:t>أَلْهَمَتِ الزَّخْرَفَةُ عَدَدًا مِنَ الطُّلَّابِ.</a:t>
@@ -21541,6 +21605,7 @@
                   <a:srgbClr val="8A6D1E"/>
                 </a:solidFill>
                 <a:latin typeface="Amiri" pitchFamily="2" charset="-78"/>
+                <a:ea typeface="Amiri" pitchFamily="2" charset="-78"/>
                 <a:cs typeface="Amiri" pitchFamily="2" charset="-78"/>
               </a:rPr>
               <a:t>عَبَّرَتِ المُوسِيقَى عَنْ تُرَاثٍ طَوِيلٍ.</a:t>
@@ -22044,6 +22109,7 @@
                   <a:srgbClr val="8A6D1E"/>
                 </a:solidFill>
                 <a:latin typeface="Amiri" pitchFamily="2" charset="-78"/>
+                <a:ea typeface="Amiri" pitchFamily="2" charset="-78"/>
                 <a:cs typeface="Amiri" pitchFamily="2" charset="-78"/>
               </a:rPr>
               <a:t>فِي بَعْضِ المَدَارِسِ … وَلٰكِنْ لَيْسَ دَائِمًا؛ فَالأَذْوَاقُ تَخْتَلِفُ.</a:t>
@@ -22177,6 +22243,7 @@
                   <a:srgbClr val="D4AF37"/>
                 </a:solidFill>
                 <a:latin typeface="Amiri" pitchFamily="2" charset="-78"/>
+                <a:ea typeface="Amiri" pitchFamily="2" charset="-78"/>
                 <a:cs typeface="Amiri" pitchFamily="2" charset="-78"/>
               </a:rPr>
               <a:t>م</a:t>
@@ -22497,6 +22564,7 @@
                   <a:srgbClr val="8A6D1E"/>
                 </a:solidFill>
                 <a:latin typeface="Amiri" pitchFamily="2" charset="-78"/>
+                <a:ea typeface="Amiri" pitchFamily="2" charset="-78"/>
                 <a:cs typeface="Amiri" pitchFamily="2" charset="-78"/>
               </a:rPr>
               <a:t>سَنَةٌ مِنْ حَيَاتِي</a:t>
@@ -22610,6 +22678,7 @@
                   <a:srgbClr val="1F2A37"/>
                 </a:solidFill>
                 <a:latin typeface="Amiri" pitchFamily="2" charset="-78"/>
+                <a:ea typeface="Amiri" pitchFamily="2" charset="-78"/>
                 <a:cs typeface="Amiri" pitchFamily="2" charset="-78"/>
               </a:rPr>
               <a:t>فِي الطُّفُولَةِ كُنْتُ أَلْعَبُ كُرَةَ السَّلَّةِ فِي الشَّارِعِ مَعَ أَصْدِقَائِي كُلَّ مَسَاءٍ، وَكَانَ أَخِي الأَكْبَرُ يُشَجِّعُنِي دَائِمًا. وَفِي العَامِ المَاضِي اشْتَرَكْتُ فِي نَادٍ قَرِيبٍ وَتَدَرَّبْتُ ثَلَاثَ مَرَّاتٍ فِي الأُسْبُوعِ. فَجْأَةً أُصِبْتُ فِي كَتِفِي، وَلِلْأَسَفِ تَوَقَّفْتُ شَهْرًا كَامِلًا. وَلٰكِنْ لِحُسْنِ الحَظِّ عُدْتُ بَعْدَ ذٰلِكَ أَقْوَى، وَفُزْنَا بِالمَرْكَزِ الثَّانِي فِي بُطُولَةِ المَدَارِسِ. أَمَّا الآنَ فَأُمَارِسُ السِّبَاحَةَ مَرَّتَيْنِ فِي الأُسْبُوعِ، وَأَسْتَمْتِعُ بِهَا أَكْثَرَ مِنَ الجَرْيِ. وَفِي المُسْتَقْبَلِ سَأَشْتَرِكُ فِي بُطُولَةٍ جَدِيدَةٍ، وَأَنْوِي أَنْ أَتَعَلَّمَ العَزْفَ عَلَى العُودِ. بِصَرَاحَةٍ، كَانَتْ تِلْكَ السَّنَةُ مِنْ أَجْمَلِ سَنَوَاتِ حَيَاتِي.</a:t>
@@ -22743,6 +22812,7 @@
                   <a:srgbClr val="D4AF37"/>
                 </a:solidFill>
                 <a:latin typeface="Amiri" pitchFamily="2" charset="-78"/>
+                <a:ea typeface="Amiri" pitchFamily="2" charset="-78"/>
                 <a:cs typeface="Amiri" pitchFamily="2" charset="-78"/>
               </a:rPr>
               <a:t>م</a:t>
@@ -23063,6 +23133,7 @@
                   <a:srgbClr val="8A6D1E"/>
                 </a:solidFill>
                 <a:latin typeface="Amiri" pitchFamily="2" charset="-78"/>
+                <a:ea typeface="Amiri" pitchFamily="2" charset="-78"/>
                 <a:cs typeface="Amiri" pitchFamily="2" charset="-78"/>
               </a:rPr>
               <a:t>أَسْئِلَةُ القِرَاءَةِ</a:t>
@@ -24651,6 +24722,7 @@
                   <a:srgbClr val="1F2A37"/>
                 </a:solidFill>
                 <a:latin typeface="Amiri" pitchFamily="2" charset="-78"/>
+                <a:ea typeface="Amiri" pitchFamily="2" charset="-78"/>
                 <a:cs typeface="Amiri" pitchFamily="2" charset="-78"/>
               </a:rPr>
               <a:t>فَجْأَةً أُصِبْتُ فِي كَتِفِي</a:t>
@@ -24752,6 +24824,7 @@
                   <a:srgbClr val="1F2A37"/>
                 </a:solidFill>
                 <a:latin typeface="Amiri" pitchFamily="2" charset="-78"/>
+                <a:ea typeface="Amiri" pitchFamily="2" charset="-78"/>
                 <a:cs typeface="Amiri" pitchFamily="2" charset="-78"/>
               </a:rPr>
               <a:t>تَوَقَّفْتُ شَهْرًا كَامِلًا</a:t>
@@ -24853,6 +24926,7 @@
                   <a:srgbClr val="1F2A37"/>
                 </a:solidFill>
                 <a:latin typeface="Amiri" pitchFamily="2" charset="-78"/>
+                <a:ea typeface="Amiri" pitchFamily="2" charset="-78"/>
                 <a:cs typeface="Amiri" pitchFamily="2" charset="-78"/>
               </a:rPr>
               <a:t>كَانَتْ تِلْكَ السَّنَةُ مِنْ أَجْمَلِ سَنَوَاتِ حَيَاتِي</a:t>
@@ -25089,6 +25163,7 @@
                   <a:srgbClr val="1F2A37"/>
                 </a:solidFill>
                 <a:latin typeface="Amiri" pitchFamily="2" charset="-78"/>
+                <a:ea typeface="Amiri" pitchFamily="2" charset="-78"/>
                 <a:cs typeface="Amiri" pitchFamily="2" charset="-78"/>
               </a:rPr>
               <a:t>لِحُسْنِ الحَظِّ عُدْتُ بَعْدَ ذٰلِكَ أَقْوَى</a:t>
@@ -25190,6 +25265,7 @@
                   <a:srgbClr val="1F2A37"/>
                 </a:solidFill>
                 <a:latin typeface="Amiri" pitchFamily="2" charset="-78"/>
+                <a:ea typeface="Amiri" pitchFamily="2" charset="-78"/>
                 <a:cs typeface="Amiri" pitchFamily="2" charset="-78"/>
               </a:rPr>
               <a:t>لِلْأَسَفِ تَوَقَّفْتُ شَهْرًا</a:t>
@@ -25291,6 +25367,7 @@
                   <a:srgbClr val="1F2A37"/>
                 </a:solidFill>
                 <a:latin typeface="Amiri" pitchFamily="2" charset="-78"/>
+                <a:ea typeface="Amiri" pitchFamily="2" charset="-78"/>
                 <a:cs typeface="Amiri" pitchFamily="2" charset="-78"/>
               </a:rPr>
               <a:t>أُصِبْتُ فِي كَتِفِي</a:t>
@@ -25424,6 +25501,7 @@
                   <a:srgbClr val="D4AF37"/>
                 </a:solidFill>
                 <a:latin typeface="Amiri" pitchFamily="2" charset="-78"/>
+                <a:ea typeface="Amiri" pitchFamily="2" charset="-78"/>
                 <a:cs typeface="Amiri" pitchFamily="2" charset="-78"/>
               </a:rPr>
               <a:t>م</a:t>
@@ -25744,6 +25822,7 @@
                   <a:srgbClr val="8A6D1E"/>
                 </a:solidFill>
                 <a:latin typeface="Amiri" pitchFamily="2" charset="-78"/>
+                <a:ea typeface="Amiri" pitchFamily="2" charset="-78"/>
                 <a:cs typeface="Amiri" pitchFamily="2" charset="-78"/>
               </a:rPr>
               <a:t>الإِجَابَاتُ</a:t>
@@ -26285,6 +26364,7 @@
                   <a:srgbClr val="8A6D1E"/>
                 </a:solidFill>
                 <a:latin typeface="Amiri" pitchFamily="2" charset="-78"/>
+                <a:ea typeface="Amiri" pitchFamily="2" charset="-78"/>
                 <a:cs typeface="Amiri" pitchFamily="2" charset="-78"/>
               </a:rPr>
               <a:t>أَمَّا الآنَ فَأُمَارِسُ السِّبَاحَةَ مَرَّتَيْنِ فِي الأُسْبُوعِ.</a:t>
@@ -26788,6 +26868,7 @@
                   <a:srgbClr val="8A6D1E"/>
                 </a:solidFill>
                 <a:latin typeface="Amiri" pitchFamily="2" charset="-78"/>
+                <a:ea typeface="Amiri" pitchFamily="2" charset="-78"/>
                 <a:cs typeface="Amiri" pitchFamily="2" charset="-78"/>
               </a:rPr>
               <a:t>فِي العَامِ المَاضِي اشْتَرَكْتُ فِي نَادٍ قَرِيبٍ وَتَدَرَّبْتُ ثَلَاثَ مَرَّاتٍ فِي الأُسْبُوعِ.</a:t>
@@ -27291,6 +27372,7 @@
                   <a:srgbClr val="8A6D1E"/>
                 </a:solidFill>
                 <a:latin typeface="Amiri" pitchFamily="2" charset="-78"/>
+                <a:ea typeface="Amiri" pitchFamily="2" charset="-78"/>
                 <a:cs typeface="Amiri" pitchFamily="2" charset="-78"/>
               </a:rPr>
               <a:t>فَجْأَةً أُصِبْتُ فِي كَتِفِي.</a:t>
@@ -27527,6 +27609,7 @@
                   <a:srgbClr val="9AA1AB"/>
                 </a:solidFill>
                 <a:latin typeface="Amiri" pitchFamily="2" charset="-78"/>
+                <a:ea typeface="Amiri" pitchFamily="2" charset="-78"/>
                 <a:cs typeface="Amiri" pitchFamily="2" charset="-78"/>
               </a:rPr>
               <a:t>فَجْأَةً أُصِبْتُ فِي كَتِفِي</a:t>
@@ -27628,6 +27711,7 @@
                   <a:srgbClr val="9AA1AB"/>
                 </a:solidFill>
                 <a:latin typeface="Amiri" pitchFamily="2" charset="-78"/>
+                <a:ea typeface="Amiri" pitchFamily="2" charset="-78"/>
                 <a:cs typeface="Amiri" pitchFamily="2" charset="-78"/>
               </a:rPr>
               <a:t>تَوَقَّفْتُ شَهْرًا كَامِلًا</a:t>
@@ -27756,6 +27840,7 @@
                   <a:srgbClr val="1F2A37"/>
                 </a:solidFill>
                 <a:latin typeface="Amiri" pitchFamily="2" charset="-78"/>
+                <a:ea typeface="Amiri" pitchFamily="2" charset="-78"/>
                 <a:cs typeface="Amiri" pitchFamily="2" charset="-78"/>
               </a:rPr>
               <a:t>كَانَتْ تِلْكَ السَّنَةُ مِنْ أَجْمَلِ سَنَوَاتِ حَيَاتِي</a:t>
@@ -28057,6 +28142,7 @@
                   <a:srgbClr val="1F2A37"/>
                 </a:solidFill>
                 <a:latin typeface="Amiri" pitchFamily="2" charset="-78"/>
+                <a:ea typeface="Amiri" pitchFamily="2" charset="-78"/>
                 <a:cs typeface="Amiri" pitchFamily="2" charset="-78"/>
               </a:rPr>
               <a:t>لِحُسْنِ الحَظِّ عُدْتُ بَعْدَ ذٰلِكَ أَقْوَى</a:t>
@@ -28158,6 +28244,7 @@
                   <a:srgbClr val="9AA1AB"/>
                 </a:solidFill>
                 <a:latin typeface="Amiri" pitchFamily="2" charset="-78"/>
+                <a:ea typeface="Amiri" pitchFamily="2" charset="-78"/>
                 <a:cs typeface="Amiri" pitchFamily="2" charset="-78"/>
               </a:rPr>
               <a:t>لِلْأَسَفِ تَوَقَّفْتُ شَهْرًا</a:t>
@@ -28259,6 +28346,7 @@
                   <a:srgbClr val="9AA1AB"/>
                 </a:solidFill>
                 <a:latin typeface="Amiri" pitchFamily="2" charset="-78"/>
+                <a:ea typeface="Amiri" pitchFamily="2" charset="-78"/>
                 <a:cs typeface="Amiri" pitchFamily="2" charset="-78"/>
               </a:rPr>
               <a:t>أُصِبْتُ فِي كَتِفِي</a:t>
@@ -28297,6 +28385,7 @@
                   <a:srgbClr val="8A6D1E"/>
                 </a:solidFill>
                 <a:latin typeface="Amiri" pitchFamily="2" charset="-78"/>
+                <a:ea typeface="Amiri" pitchFamily="2" charset="-78"/>
                 <a:cs typeface="Amiri" pitchFamily="2" charset="-78"/>
               </a:rPr>
               <a:t>لِحُسْنِ الحَظِّ</a:t>
@@ -28443,6 +28532,7 @@
                   <a:srgbClr val="D4AF37"/>
                 </a:solidFill>
                 <a:latin typeface="Amiri" pitchFamily="2" charset="-78"/>
+                <a:ea typeface="Amiri" pitchFamily="2" charset="-78"/>
                 <a:cs typeface="Amiri" pitchFamily="2" charset="-78"/>
               </a:rPr>
               <a:t>م</a:t>
@@ -28763,6 +28853,7 @@
                   <a:srgbClr val="8A6D1E"/>
                 </a:solidFill>
                 <a:latin typeface="Amiri" pitchFamily="2" charset="-78"/>
+                <a:ea typeface="Amiri" pitchFamily="2" charset="-78"/>
                 <a:cs typeface="Amiri" pitchFamily="2" charset="-78"/>
               </a:rPr>
               <a:t>أَسْئِلَةُ القِرَاءَةِ</a:t>
@@ -28949,6 +29040,7 @@
                   <a:srgbClr val="1B3B6F"/>
                 </a:solidFill>
                 <a:latin typeface="Amiri" pitchFamily="2" charset="-78"/>
+                <a:ea typeface="Amiri" pitchFamily="2" charset="-78"/>
                 <a:cs typeface="Amiri" pitchFamily="2" charset="-78"/>
               </a:rPr>
               <a:t>وَفِي المُسْتَقْبَلِ</a:t>
@@ -28975,6 +29067,7 @@
                   <a:srgbClr val="1B3B6F"/>
                 </a:solidFill>
                 <a:latin typeface="Amiri" pitchFamily="2" charset="-78"/>
+                <a:ea typeface="Amiri" pitchFamily="2" charset="-78"/>
                 <a:cs typeface="Amiri" pitchFamily="2" charset="-78"/>
               </a:rPr>
               <a:t>فِي بُطُولَةٍ جَدِيدَةٍ</a:t>
@@ -29089,6 +29182,7 @@
                   <a:srgbClr val="1F2A37"/>
                 </a:solidFill>
                 <a:latin typeface="Amiri" pitchFamily="2" charset="-78"/>
+                <a:ea typeface="Amiri" pitchFamily="2" charset="-78"/>
                 <a:cs typeface="Amiri" pitchFamily="2" charset="-78"/>
               </a:rPr>
               <a:t>اشْتَرَكْتُ</a:t>
@@ -29190,6 +29284,7 @@
                   <a:srgbClr val="1F2A37"/>
                 </a:solidFill>
                 <a:latin typeface="Amiri" pitchFamily="2" charset="-78"/>
+                <a:ea typeface="Amiri" pitchFamily="2" charset="-78"/>
                 <a:cs typeface="Amiri" pitchFamily="2" charset="-78"/>
               </a:rPr>
               <a:t>سَأَشْتَرِكُ</a:t>
@@ -29291,6 +29386,7 @@
                   <a:srgbClr val="1F2A37"/>
                 </a:solidFill>
                 <a:latin typeface="Amiri" pitchFamily="2" charset="-78"/>
+                <a:ea typeface="Amiri" pitchFamily="2" charset="-78"/>
                 <a:cs typeface="Amiri" pitchFamily="2" charset="-78"/>
               </a:rPr>
               <a:t>كُنْتُ أَشْتَرِكُ</a:t>
@@ -31176,6 +31272,7 @@
                   <a:srgbClr val="D4AF37"/>
                 </a:solidFill>
                 <a:latin typeface="Amiri" pitchFamily="2" charset="-78"/>
+                <a:ea typeface="Amiri" pitchFamily="2" charset="-78"/>
                 <a:cs typeface="Amiri" pitchFamily="2" charset="-78"/>
               </a:rPr>
               <a:t>م</a:t>
@@ -31496,6 +31593,7 @@
                   <a:srgbClr val="8A6D1E"/>
                 </a:solidFill>
                 <a:latin typeface="Amiri" pitchFamily="2" charset="-78"/>
+                <a:ea typeface="Amiri" pitchFamily="2" charset="-78"/>
                 <a:cs typeface="Amiri" pitchFamily="2" charset="-78"/>
               </a:rPr>
               <a:t>آدَابُ الصَّفِّ</a:t>
@@ -33027,6 +33125,7 @@
                   <a:srgbClr val="D4AF37"/>
                 </a:solidFill>
                 <a:latin typeface="Amiri" pitchFamily="2" charset="-78"/>
+                <a:ea typeface="Amiri" pitchFamily="2" charset="-78"/>
                 <a:cs typeface="Amiri" pitchFamily="2" charset="-78"/>
               </a:rPr>
               <a:t>م</a:t>
@@ -33347,6 +33446,7 @@
                   <a:srgbClr val="8A6D1E"/>
                 </a:solidFill>
                 <a:latin typeface="Amiri" pitchFamily="2" charset="-78"/>
+                <a:ea typeface="Amiri" pitchFamily="2" charset="-78"/>
                 <a:cs typeface="Amiri" pitchFamily="2" charset="-78"/>
               </a:rPr>
               <a:t>الإِجَابَاتُ</a:t>
@@ -33533,6 +33633,7 @@
                   <a:srgbClr val="1B3B6F"/>
                 </a:solidFill>
                 <a:latin typeface="Amiri" pitchFamily="2" charset="-78"/>
+                <a:ea typeface="Amiri" pitchFamily="2" charset="-78"/>
                 <a:cs typeface="Amiri" pitchFamily="2" charset="-78"/>
               </a:rPr>
               <a:t>وَفِي المُسْتَقْبَلِ</a:t>
@@ -33559,6 +33660,7 @@
                   <a:srgbClr val="1B3B6F"/>
                 </a:solidFill>
                 <a:latin typeface="Amiri" pitchFamily="2" charset="-78"/>
+                <a:ea typeface="Amiri" pitchFamily="2" charset="-78"/>
                 <a:cs typeface="Amiri" pitchFamily="2" charset="-78"/>
               </a:rPr>
               <a:t>فِي بُطُولَةٍ جَدِيدَةٍ</a:t>
@@ -33673,6 +33775,7 @@
                   <a:srgbClr val="9AA1AB"/>
                 </a:solidFill>
                 <a:latin typeface="Amiri" pitchFamily="2" charset="-78"/>
+                <a:ea typeface="Amiri" pitchFamily="2" charset="-78"/>
                 <a:cs typeface="Amiri" pitchFamily="2" charset="-78"/>
               </a:rPr>
               <a:t>اشْتَرَكْتُ</a:t>
@@ -33801,6 +33904,7 @@
                   <a:srgbClr val="1F2A37"/>
                 </a:solidFill>
                 <a:latin typeface="Amiri" pitchFamily="2" charset="-78"/>
+                <a:ea typeface="Amiri" pitchFamily="2" charset="-78"/>
                 <a:cs typeface="Amiri" pitchFamily="2" charset="-78"/>
               </a:rPr>
               <a:t>سَأَشْتَرِكُ</a:t>
@@ -33902,6 +34006,7 @@
                   <a:srgbClr val="9AA1AB"/>
                 </a:solidFill>
                 <a:latin typeface="Amiri" pitchFamily="2" charset="-78"/>
+                <a:ea typeface="Amiri" pitchFamily="2" charset="-78"/>
                 <a:cs typeface="Amiri" pitchFamily="2" charset="-78"/>
               </a:rPr>
               <a:t>كُنْتُ أَشْتَرِكُ</a:t>
@@ -33940,6 +34045,7 @@
                   <a:srgbClr val="8A6D1E"/>
                 </a:solidFill>
                 <a:latin typeface="Amiri" pitchFamily="2" charset="-78"/>
+                <a:ea typeface="Amiri" pitchFamily="2" charset="-78"/>
                 <a:cs typeface="Amiri" pitchFamily="2" charset="-78"/>
               </a:rPr>
               <a:t>فِي المُسْتَقْبَلِ</a:t>
@@ -33966,6 +34072,7 @@
                   <a:srgbClr val="8A6D1E"/>
                 </a:solidFill>
                 <a:latin typeface="Amiri" pitchFamily="2" charset="-78"/>
+                <a:ea typeface="Amiri" pitchFamily="2" charset="-78"/>
                 <a:cs typeface="Amiri" pitchFamily="2" charset="-78"/>
               </a:rPr>
               <a:t>سَـ</a:t>
@@ -34482,6 +34589,7 @@
                   <a:srgbClr val="8A6D1E"/>
                 </a:solidFill>
                 <a:latin typeface="Amiri" pitchFamily="2" charset="-78"/>
+                <a:ea typeface="Amiri" pitchFamily="2" charset="-78"/>
                 <a:cs typeface="Amiri" pitchFamily="2" charset="-78"/>
               </a:rPr>
               <a:t>تَدَرَّبْتُ ثَلَاثَ مَرَّاتٍ فِي الأُسْبُوعِ.</a:t>
@@ -34985,6 +35093,7 @@
                   <a:srgbClr val="8A6D1E"/>
                 </a:solidFill>
                 <a:latin typeface="Amiri" pitchFamily="2" charset="-78"/>
+                <a:ea typeface="Amiri" pitchFamily="2" charset="-78"/>
                 <a:cs typeface="Amiri" pitchFamily="2" charset="-78"/>
               </a:rPr>
               <a:t>كَانَ أَخِي الأَكْبَرُ يُشَجِّعُنِي دَائِمًا.</a:t>
@@ -35488,6 +35597,7 @@
                   <a:srgbClr val="8A6D1E"/>
                 </a:solidFill>
                 <a:latin typeface="Amiri" pitchFamily="2" charset="-78"/>
+                <a:ea typeface="Amiri" pitchFamily="2" charset="-78"/>
                 <a:cs typeface="Amiri" pitchFamily="2" charset="-78"/>
               </a:rPr>
               <a:t>فُزْنَا بِالمَرْكَزِ الثَّانِي فِي بُطُولَةِ المَدَارِسِ.</a:t>
@@ -35991,6 +36101,7 @@
                   <a:srgbClr val="8A6D1E"/>
                 </a:solidFill>
                 <a:latin typeface="Amiri" pitchFamily="2" charset="-78"/>
+                <a:ea typeface="Amiri" pitchFamily="2" charset="-78"/>
                 <a:cs typeface="Amiri" pitchFamily="2" charset="-78"/>
               </a:rPr>
               <a:t>أَسْتَمْتِعُ بِهَا أَكْثَرَ مِنَ الجَرْيِ.</a:t>
@@ -36124,6 +36235,7 @@
                   <a:srgbClr val="D4AF37"/>
                 </a:solidFill>
                 <a:latin typeface="Amiri" pitchFamily="2" charset="-78"/>
+                <a:ea typeface="Amiri" pitchFamily="2" charset="-78"/>
                 <a:cs typeface="Amiri" pitchFamily="2" charset="-78"/>
               </a:rPr>
               <a:t>م</a:t>
@@ -36444,6 +36556,7 @@
                   <a:srgbClr val="8A6D1E"/>
                 </a:solidFill>
                 <a:latin typeface="Amiri" pitchFamily="2" charset="-78"/>
+                <a:ea typeface="Amiri" pitchFamily="2" charset="-78"/>
                 <a:cs typeface="Amiri" pitchFamily="2" charset="-78"/>
               </a:rPr>
               <a:t>مِلَفُّ التَّرْفِيهِ</a:t>
@@ -36724,6 +36837,7 @@
                   <a:srgbClr val="1B3B6F"/>
                 </a:solidFill>
                 <a:latin typeface="Amiri" pitchFamily="2" charset="-78"/>
+                <a:ea typeface="Amiri" pitchFamily="2" charset="-78"/>
                 <a:cs typeface="Amiri" pitchFamily="2" charset="-78"/>
               </a:rPr>
               <a:t>هِوَايَتِي المُفَضَّلَةُ مَعَ الفِعْلِ الصَّحِيحِ</a:t>
@@ -36930,6 +37044,7 @@
                   <a:srgbClr val="1B3B6F"/>
                 </a:solidFill>
                 <a:latin typeface="Amiri" pitchFamily="2" charset="-78"/>
+                <a:ea typeface="Amiri" pitchFamily="2" charset="-78"/>
                 <a:cs typeface="Amiri" pitchFamily="2" charset="-78"/>
               </a:rPr>
               <a:t>الرِّيَاضَةُ الَّتِي أُمَارِسُهَا</a:t>
@@ -37136,6 +37251,7 @@
                   <a:srgbClr val="1B3B6F"/>
                 </a:solidFill>
                 <a:latin typeface="Amiri" pitchFamily="2" charset="-78"/>
+                <a:ea typeface="Amiri" pitchFamily="2" charset="-78"/>
                 <a:cs typeface="Amiri" pitchFamily="2" charset="-78"/>
               </a:rPr>
               <a:t>وِجْهَةُ إِجَازَتِي الأَخِيرَةِ (اِسْتَعْمِلْ حَجَزَ أَوْ أَقَامَ)</a:t>
@@ -37342,6 +37458,7 @@
                   <a:srgbClr val="1B3B6F"/>
                 </a:solidFill>
                 <a:latin typeface="Amiri" pitchFamily="2" charset="-78"/>
+                <a:ea typeface="Amiri" pitchFamily="2" charset="-78"/>
                 <a:cs typeface="Amiri" pitchFamily="2" charset="-78"/>
               </a:rPr>
               <a:t>نَشَاطٌ ثَقَافِيٌّ حَضَرْتُهُ</a:t>
@@ -37548,6 +37665,7 @@
                   <a:srgbClr val="1B3B6F"/>
                 </a:solidFill>
                 <a:latin typeface="Amiri" pitchFamily="2" charset="-78"/>
+                <a:ea typeface="Amiri" pitchFamily="2" charset="-78"/>
                 <a:cs typeface="Amiri" pitchFamily="2" charset="-78"/>
               </a:rPr>
               <a:t>خُطَّتِي التَّرْفِيهِيَّةُ القَادِمَةُ</a:t>
@@ -37702,6 +37820,7 @@
                   <a:srgbClr val="1B3B6F"/>
                 </a:solidFill>
                 <a:latin typeface="Amiri" pitchFamily="2" charset="-78"/>
+                <a:ea typeface="Amiri" pitchFamily="2" charset="-78"/>
                 <a:cs typeface="Amiri" pitchFamily="2" charset="-78"/>
               </a:rPr>
               <a:t>أُمَارِسُ السِّبَاحَةَ</a:t>
@@ -37728,6 +37847,7 @@
                   <a:srgbClr val="1B3B6F"/>
                 </a:solidFill>
                 <a:latin typeface="Amiri" pitchFamily="2" charset="-78"/>
+                <a:ea typeface="Amiri" pitchFamily="2" charset="-78"/>
                 <a:cs typeface="Amiri" pitchFamily="2" charset="-78"/>
               </a:rPr>
               <a:t>كُرَةُ السَّلَّةِ</a:t>
@@ -37754,6 +37874,7 @@
                   <a:srgbClr val="1B3B6F"/>
                 </a:solidFill>
                 <a:latin typeface="Amiri" pitchFamily="2" charset="-78"/>
+                <a:ea typeface="Amiri" pitchFamily="2" charset="-78"/>
                 <a:cs typeface="Amiri" pitchFamily="2" charset="-78"/>
               </a:rPr>
               <a:t>أَقَمْتُ فِي فُنْدُقٍ فِي عَمَّانَ</a:t>
@@ -37780,6 +37901,7 @@
                   <a:srgbClr val="1B3B6F"/>
                 </a:solidFill>
                 <a:latin typeface="Amiri" pitchFamily="2" charset="-78"/>
+                <a:ea typeface="Amiri" pitchFamily="2" charset="-78"/>
                 <a:cs typeface="Amiri" pitchFamily="2" charset="-78"/>
               </a:rPr>
               <a:t>حَضَرْتُ مَعْرِضًا لِلْخَطِّ العَرَبِيِّ</a:t>
@@ -37806,6 +37928,7 @@
                   <a:srgbClr val="1B3B6F"/>
                 </a:solidFill>
                 <a:latin typeface="Amiri" pitchFamily="2" charset="-78"/>
+                <a:ea typeface="Amiri" pitchFamily="2" charset="-78"/>
                 <a:cs typeface="Amiri" pitchFamily="2" charset="-78"/>
               </a:rPr>
               <a:t>سَأَتَعَلَّمُ العَزْفَ عَلَى العُودِ</a:t>
@@ -37939,6 +38062,7 @@
                   <a:srgbClr val="D4AF37"/>
                 </a:solidFill>
                 <a:latin typeface="Amiri" pitchFamily="2" charset="-78"/>
+                <a:ea typeface="Amiri" pitchFamily="2" charset="-78"/>
                 <a:cs typeface="Amiri" pitchFamily="2" charset="-78"/>
               </a:rPr>
               <a:t>م</a:t>
@@ -38259,6 +38383,7 @@
                   <a:srgbClr val="8A6D1E"/>
                 </a:solidFill>
                 <a:latin typeface="Amiri" pitchFamily="2" charset="-78"/>
+                <a:ea typeface="Amiri" pitchFamily="2" charset="-78"/>
                 <a:cs typeface="Amiri" pitchFamily="2" charset="-78"/>
               </a:rPr>
               <a:t>المَاضِي وَالحَاضِرُ وَالمُسْتَقْبَلُ</a:t>
@@ -39073,6 +39198,7 @@
                   <a:srgbClr val="D4AF37"/>
                 </a:solidFill>
                 <a:latin typeface="Amiri" pitchFamily="2" charset="-78"/>
+                <a:ea typeface="Amiri" pitchFamily="2" charset="-78"/>
                 <a:cs typeface="Amiri" pitchFamily="2" charset="-78"/>
               </a:rPr>
               <a:t>م</a:t>
@@ -39393,6 +39519,7 @@
                   <a:srgbClr val="8A6D1E"/>
                 </a:solidFill>
                 <a:latin typeface="Amiri" pitchFamily="2" charset="-78"/>
+                <a:ea typeface="Amiri" pitchFamily="2" charset="-78"/>
                 <a:cs typeface="Amiri" pitchFamily="2" charset="-78"/>
               </a:rPr>
               <a:t>فِي المَرْكَزِ التَّرْفِيهِيِّ</a:t>
@@ -39635,6 +39762,7 @@
                   <a:srgbClr val="1B3B6F"/>
                 </a:solidFill>
                 <a:latin typeface="Amiri" pitchFamily="2" charset="-78"/>
+                <a:ea typeface="Amiri" pitchFamily="2" charset="-78"/>
                 <a:cs typeface="Amiri" pitchFamily="2" charset="-78"/>
               </a:rPr>
               <a:t>اِسْأَلْ عَنِ الأَنْشِطَةِ المُتَوَفِّرَةِ فِي المَرْكَزِ.</a:t>
@@ -39803,6 +39931,7 @@
                   <a:srgbClr val="1B3B6F"/>
                 </a:solidFill>
                 <a:latin typeface="Amiri" pitchFamily="2" charset="-78"/>
+                <a:ea typeface="Amiri" pitchFamily="2" charset="-78"/>
                 <a:cs typeface="Amiri" pitchFamily="2" charset="-78"/>
               </a:rPr>
               <a:t>اِسْأَلْ عَنْ أَوْقَاتِ العَمَلِ.</a:t>
@@ -39971,6 +40100,7 @@
                   <a:srgbClr val="1B3B6F"/>
                 </a:solidFill>
                 <a:latin typeface="Amiri" pitchFamily="2" charset="-78"/>
+                <a:ea typeface="Amiri" pitchFamily="2" charset="-78"/>
                 <a:cs typeface="Amiri" pitchFamily="2" charset="-78"/>
               </a:rPr>
               <a:t>قُلْ مَاذَا فَعَلْتَ هُنَا فِي المَرَّةِ المَاضِيَةِ.</a:t>
@@ -40139,6 +40269,7 @@
                   <a:srgbClr val="1B3B6F"/>
                 </a:solidFill>
                 <a:latin typeface="Amiri" pitchFamily="2" charset="-78"/>
+                <a:ea typeface="Amiri" pitchFamily="2" charset="-78"/>
                 <a:cs typeface="Amiri" pitchFamily="2" charset="-78"/>
               </a:rPr>
               <a:t>قُلْ مَاذَا تَنْوِي أَنْ تَفْعَلَ فِي المَرَّةِ القَادِمَةِ.</a:t>
@@ -40375,6 +40506,7 @@
                   <a:srgbClr val="D4AF37"/>
                 </a:solidFill>
                 <a:latin typeface="Amiri" pitchFamily="2" charset="-78"/>
+                <a:ea typeface="Amiri" pitchFamily="2" charset="-78"/>
                 <a:cs typeface="Amiri" pitchFamily="2" charset="-78"/>
               </a:rPr>
               <a:t>م</a:t>
@@ -40695,6 +40827,7 @@
                   <a:srgbClr val="8A6D1E"/>
                 </a:solidFill>
                 <a:latin typeface="Amiri" pitchFamily="2" charset="-78"/>
+                <a:ea typeface="Amiri" pitchFamily="2" charset="-78"/>
                 <a:cs typeface="Amiri" pitchFamily="2" charset="-78"/>
               </a:rPr>
               <a:t>المُحَادَثَةُ</a:t>
@@ -40937,6 +41070,7 @@
                   <a:srgbClr val="1B3B6F"/>
                 </a:solidFill>
                 <a:latin typeface="Amiri" pitchFamily="2" charset="-78"/>
+                <a:ea typeface="Amiri" pitchFamily="2" charset="-78"/>
                 <a:cs typeface="Amiri" pitchFamily="2" charset="-78"/>
               </a:rPr>
               <a:t>مَا هِوَايَتُكَ المُفَضَّلَةُ وَكَيْفَ بَدَأْتَ بِهَا؟</a:t>
@@ -41105,6 +41239,7 @@
                   <a:srgbClr val="1B3B6F"/>
                 </a:solidFill>
                 <a:latin typeface="Amiri" pitchFamily="2" charset="-78"/>
+                <a:ea typeface="Amiri" pitchFamily="2" charset="-78"/>
                 <a:cs typeface="Amiri" pitchFamily="2" charset="-78"/>
               </a:rPr>
               <a:t>صِفْ تَجْرِبَةً رِيَاضِيَّةً مَرَرْتَ بِهَا.</a:t>
@@ -41273,6 +41408,7 @@
                   <a:srgbClr val="1B3B6F"/>
                 </a:solidFill>
                 <a:latin typeface="Amiri" pitchFamily="2" charset="-78"/>
+                <a:ea typeface="Amiri" pitchFamily="2" charset="-78"/>
                 <a:cs typeface="Amiri" pitchFamily="2" charset="-78"/>
               </a:rPr>
               <a:t>مَا خُطَطُكَ لِلْإِجَازَةِ القَادِمَةِ؟</a:t>
@@ -41509,6 +41645,7 @@
                   <a:srgbClr val="D4AF37"/>
                 </a:solidFill>
                 <a:latin typeface="Amiri" pitchFamily="2" charset="-78"/>
+                <a:ea typeface="Amiri" pitchFamily="2" charset="-78"/>
                 <a:cs typeface="Amiri" pitchFamily="2" charset="-78"/>
               </a:rPr>
               <a:t>م</a:t>
@@ -41829,6 +41966,7 @@
                   <a:srgbClr val="8A6D1E"/>
                 </a:solidFill>
                 <a:latin typeface="Amiri" pitchFamily="2" charset="-78"/>
+                <a:ea typeface="Amiri" pitchFamily="2" charset="-78"/>
                 <a:cs typeface="Amiri" pitchFamily="2" charset="-78"/>
               </a:rPr>
               <a:t>مِلَفُّ المَهَارَاتِ</a:t>
@@ -43001,6 +43139,7 @@
                   <a:srgbClr val="D4AF37"/>
                 </a:solidFill>
                 <a:latin typeface="Amiri" pitchFamily="2" charset="-78"/>
+                <a:ea typeface="Amiri" pitchFamily="2" charset="-78"/>
                 <a:cs typeface="Amiri" pitchFamily="2" charset="-78"/>
               </a:rPr>
               <a:t>م</a:t>
@@ -43321,6 +43460,7 @@
                   <a:srgbClr val="8A6D1E"/>
                 </a:solidFill>
                 <a:latin typeface="Amiri" pitchFamily="2" charset="-78"/>
+                <a:ea typeface="Amiri" pitchFamily="2" charset="-78"/>
                 <a:cs typeface="Amiri" pitchFamily="2" charset="-78"/>
               </a:rPr>
               <a:t>قَيِّمْ عَمَلَكَ</a:t>
@@ -43793,6 +43933,7 @@
                   <a:srgbClr val="1F2A37"/>
                 </a:solidFill>
                 <a:latin typeface="Amiri" pitchFamily="2" charset="-78"/>
+                <a:ea typeface="Amiri" pitchFamily="2" charset="-78"/>
                 <a:cs typeface="Amiri" pitchFamily="2" charset="-78"/>
               </a:rPr>
               <a:t>زُرْتُ</a:t>
@@ -43819,6 +43960,7 @@
                   <a:srgbClr val="1F2A37"/>
                 </a:solidFill>
                 <a:latin typeface="Amiri" pitchFamily="2" charset="-78"/>
+                <a:ea typeface="Amiri" pitchFamily="2" charset="-78"/>
                 <a:cs typeface="Amiri" pitchFamily="2" charset="-78"/>
               </a:rPr>
               <a:t>قُلْنَا</a:t>
@@ -43845,6 +43987,7 @@
                   <a:srgbClr val="1F2A37"/>
                 </a:solidFill>
                 <a:latin typeface="Amiri" pitchFamily="2" charset="-78"/>
+                <a:ea typeface="Amiri" pitchFamily="2" charset="-78"/>
                 <a:cs typeface="Amiri" pitchFamily="2" charset="-78"/>
               </a:rPr>
               <a:t>مَشَيْنَا</a:t>
@@ -44033,6 +44176,7 @@
                   <a:srgbClr val="1F2A37"/>
                 </a:solidFill>
                 <a:latin typeface="Amiri" pitchFamily="2" charset="-78"/>
+                <a:ea typeface="Amiri" pitchFamily="2" charset="-78"/>
                 <a:cs typeface="Amiri" pitchFamily="2" charset="-78"/>
               </a:rPr>
               <a:t>كَانَ</a:t>
@@ -44582,6 +44726,7 @@
                   <a:srgbClr val="D4AF37"/>
                 </a:solidFill>
                 <a:latin typeface="Amiri" pitchFamily="2" charset="-78"/>
+                <a:ea typeface="Amiri" pitchFamily="2" charset="-78"/>
                 <a:cs typeface="Amiri" pitchFamily="2" charset="-78"/>
               </a:rPr>
               <a:t>م</a:t>
@@ -44902,6 +45047,7 @@
                   <a:srgbClr val="8A6D1E"/>
                 </a:solidFill>
                 <a:latin typeface="Amiri" pitchFamily="2" charset="-78"/>
+                <a:ea typeface="Amiri" pitchFamily="2" charset="-78"/>
                 <a:cs typeface="Amiri" pitchFamily="2" charset="-78"/>
               </a:rPr>
               <a:t>التَّحْضِيرُ لِلدَّرْسِ القَادِمِ</a:t>
@@ -45115,6 +45261,7 @@
                   <a:srgbClr val="1B3B6F"/>
                 </a:solidFill>
                 <a:latin typeface="Amiri" pitchFamily="2" charset="-78"/>
+                <a:ea typeface="Amiri" pitchFamily="2" charset="-78"/>
                 <a:cs typeface="Amiri" pitchFamily="2" charset="-78"/>
               </a:rPr>
               <a:t>دَوْلَةٌ</a:t>
@@ -45161,11 +45308,12 @@
               <a:buNone/>
             </a:pPr>
             <a:r>
-              <a:rPr lang="en-US" sz="1000" i="1" dirty="0">
+              <a:rPr lang="ar-SA" sz="1000" i="1" dirty="0">
                 <a:solidFill>
                   <a:srgbClr val="5A6472"/>
                 </a:solidFill>
                 <a:latin typeface="Calibri" pitchFamily="34" charset="0"/>
+                <a:ea typeface="Amiri" pitchFamily="2" charset="-78"/>
                 <a:cs typeface="Amiri" pitchFamily="2" charset="-78"/>
               </a:rPr>
               <a:t>  pl. دُوَلٌ</a:t>
@@ -45204,6 +45352,7 @@
                   <a:srgbClr val="1B3B6F"/>
                 </a:solidFill>
                 <a:latin typeface="Amiri" pitchFamily="2" charset="-78"/>
+                <a:ea typeface="Amiri" pitchFamily="2" charset="-78"/>
                 <a:cs typeface="Amiri" pitchFamily="2" charset="-78"/>
               </a:rPr>
               <a:t>جِنْسِيَّةٌ</a:t>
@@ -45250,11 +45399,12 @@
               <a:buNone/>
             </a:pPr>
             <a:r>
-              <a:rPr lang="en-US" sz="1000" i="1" dirty="0">
+              <a:rPr lang="ar-SA" sz="1000" i="1" dirty="0">
                 <a:solidFill>
                   <a:srgbClr val="5A6472"/>
                 </a:solidFill>
                 <a:latin typeface="Calibri" pitchFamily="34" charset="0"/>
+                <a:ea typeface="Amiri" pitchFamily="2" charset="-78"/>
                 <a:cs typeface="Amiri" pitchFamily="2" charset="-78"/>
               </a:rPr>
               <a:t>  pl. جِنْسِيَّاتٌ</a:t>
@@ -45293,6 +45443,7 @@
                   <a:srgbClr val="1B3B6F"/>
                 </a:solidFill>
                 <a:latin typeface="Amiri" pitchFamily="2" charset="-78"/>
+                <a:ea typeface="Amiri" pitchFamily="2" charset="-78"/>
                 <a:cs typeface="Amiri" pitchFamily="2" charset="-78"/>
               </a:rPr>
               <a:t>لُغَةٌ رَسْمِيَّةٌ</a:t>
@@ -45339,11 +45490,12 @@
               <a:buNone/>
             </a:pPr>
             <a:r>
-              <a:rPr lang="en-US" sz="1000" i="1" dirty="0">
+              <a:rPr lang="ar-SA" sz="1000" i="1" dirty="0">
                 <a:solidFill>
                   <a:srgbClr val="5A6472"/>
                 </a:solidFill>
                 <a:latin typeface="Calibri" pitchFamily="34" charset="0"/>
+                <a:ea typeface="Amiri" pitchFamily="2" charset="-78"/>
                 <a:cs typeface="Amiri" pitchFamily="2" charset="-78"/>
               </a:rPr>
               <a:t>  pl. لُغَاتٌ رَسْمِيَّةٌ</a:t>
@@ -45382,6 +45534,7 @@
                   <a:srgbClr val="1B3B6F"/>
                 </a:solidFill>
                 <a:latin typeface="Amiri" pitchFamily="2" charset="-78"/>
+                <a:ea typeface="Amiri" pitchFamily="2" charset="-78"/>
                 <a:cs typeface="Amiri" pitchFamily="2" charset="-78"/>
               </a:rPr>
               <a:t>العَرَبِيَّةُ الفُصْحَى</a:t>
@@ -45471,6 +45624,7 @@
                   <a:srgbClr val="1B3B6F"/>
                 </a:solidFill>
                 <a:latin typeface="Amiri" pitchFamily="2" charset="-78"/>
+                <a:ea typeface="Amiri" pitchFamily="2" charset="-78"/>
                 <a:cs typeface="Amiri" pitchFamily="2" charset="-78"/>
               </a:rPr>
               <a:t>اللَّهَجَاتُ</a:t>
@@ -45517,11 +45671,12 @@
               <a:buNone/>
             </a:pPr>
             <a:r>
-              <a:rPr lang="en-US" sz="1000" i="1" dirty="0">
+              <a:rPr lang="ar-SA" sz="1000" i="1" dirty="0">
                 <a:solidFill>
                   <a:srgbClr val="5A6472"/>
                 </a:solidFill>
                 <a:latin typeface="Calibri" pitchFamily="34" charset="0"/>
+                <a:ea typeface="Amiri" pitchFamily="2" charset="-78"/>
                 <a:cs typeface="Amiri" pitchFamily="2" charset="-78"/>
               </a:rPr>
               <a:t>  sing. لَهْجَةٌ</a:t>
@@ -45636,6 +45791,7 @@
                   <a:srgbClr val="1B3B6F"/>
                 </a:solidFill>
                 <a:latin typeface="Amiri" pitchFamily="2" charset="-78"/>
+                <a:ea typeface="Amiri" pitchFamily="2" charset="-78"/>
                 <a:cs typeface="Amiri" pitchFamily="2" charset="-78"/>
               </a:rPr>
               <a:t>عَائِلَتِي مِنْ … وَاللُّغَةُ الرَّسْمِيَّةُ …</a:t>
@@ -46305,6 +46461,7 @@
                   <a:srgbClr val="FFFFFF"/>
                 </a:solidFill>
                 <a:latin typeface="Amiri" pitchFamily="2" charset="-78"/>
+                <a:ea typeface="Amiri" pitchFamily="2" charset="-78"/>
                 <a:cs typeface="Amiri" pitchFamily="2" charset="-78"/>
               </a:rPr>
               <a:t>أَحْسَنْتُمْ! إِلَى اللِّقَاءِ</a:t>
@@ -46457,6 +46614,7 @@
                   <a:srgbClr val="D4AF37"/>
                 </a:solidFill>
                 <a:latin typeface="Amiri" pitchFamily="2" charset="-78"/>
+                <a:ea typeface="Amiri" pitchFamily="2" charset="-78"/>
                 <a:cs typeface="Amiri" pitchFamily="2" charset="-78"/>
               </a:rPr>
               <a:t>دُوَلُ العَالَمِ العَرَبِيِّ وَجِنْسِيَّاتُهَا وَلُغَاتُهَا</a:t>
@@ -46590,6 +46748,7 @@
                   <a:srgbClr val="D4AF37"/>
                 </a:solidFill>
                 <a:latin typeface="Amiri" pitchFamily="2" charset="-78"/>
+                <a:ea typeface="Amiri" pitchFamily="2" charset="-78"/>
                 <a:cs typeface="Amiri" pitchFamily="2" charset="-78"/>
               </a:rPr>
               <a:t>م</a:t>
@@ -46910,6 +47069,7 @@
                   <a:srgbClr val="8A6D1E"/>
                 </a:solidFill>
                 <a:latin typeface="Amiri" pitchFamily="2" charset="-78"/>
+                <a:ea typeface="Amiri" pitchFamily="2" charset="-78"/>
                 <a:cs typeface="Amiri" pitchFamily="2" charset="-78"/>
               </a:rPr>
               <a:t>خَرِيطَةُ الدَّرْسِ</a:t>
@@ -47224,6 +47384,7 @@
                   <a:srgbClr val="0E7C86"/>
                 </a:solidFill>
                 <a:latin typeface="Amiri" pitchFamily="2" charset="-78"/>
+                <a:ea typeface="Amiri" pitchFamily="2" charset="-78"/>
                 <a:cs typeface="Amiri" pitchFamily="2" charset="-78"/>
               </a:rPr>
               <a:t>تَهْيِئَةٌ</a:t>
@@ -47500,6 +47661,7 @@
                   <a:srgbClr val="1B3B6F"/>
                 </a:solidFill>
                 <a:latin typeface="Amiri" pitchFamily="2" charset="-78"/>
+                <a:ea typeface="Amiri" pitchFamily="2" charset="-78"/>
                 <a:cs typeface="Amiri" pitchFamily="2" charset="-78"/>
               </a:rPr>
               <a:t>خُطَّةُ التَّقْيِيمِ</a:t>
@@ -47776,6 +47938,7 @@
                   <a:srgbClr val="6B4C9A"/>
                 </a:solidFill>
                 <a:latin typeface="Amiri" pitchFamily="2" charset="-78"/>
+                <a:ea typeface="Amiri" pitchFamily="2" charset="-78"/>
                 <a:cs typeface="Amiri" pitchFamily="2" charset="-78"/>
               </a:rPr>
               <a:t>الاِسْتِمَاعُ</a:t>
@@ -48052,6 +48215,7 @@
                   <a:srgbClr val="2F6FB0"/>
                 </a:solidFill>
                 <a:latin typeface="Amiri" pitchFamily="2" charset="-78"/>
+                <a:ea typeface="Amiri" pitchFamily="2" charset="-78"/>
                 <a:cs typeface="Amiri" pitchFamily="2" charset="-78"/>
               </a:rPr>
               <a:t>القِرَاءَةُ</a:t>
@@ -48328,6 +48492,7 @@
                   <a:srgbClr val="1E6B52"/>
                 </a:solidFill>
                 <a:latin typeface="Amiri" pitchFamily="2" charset="-78"/>
+                <a:ea typeface="Amiri" pitchFamily="2" charset="-78"/>
                 <a:cs typeface="Amiri" pitchFamily="2" charset="-78"/>
               </a:rPr>
               <a:t>الكِتَابَةُ وَالتَّحَدُّثُ</a:t>
@@ -48604,6 +48769,7 @@
                   <a:srgbClr val="8A6D1E"/>
                 </a:solidFill>
                 <a:latin typeface="Amiri" pitchFamily="2" charset="-78"/>
+                <a:ea typeface="Amiri" pitchFamily="2" charset="-78"/>
                 <a:cs typeface="Amiri" pitchFamily="2" charset="-78"/>
               </a:rPr>
               <a:t>الهَدَفُ</a:t>
@@ -48880,6 +49046,7 @@
                   <a:srgbClr val="C45A3C"/>
                 </a:solidFill>
                 <a:latin typeface="Amiri" pitchFamily="2" charset="-78"/>
+                <a:ea typeface="Amiri" pitchFamily="2" charset="-78"/>
                 <a:cs typeface="Amiri" pitchFamily="2" charset="-78"/>
               </a:rPr>
               <a:t>اِسْتَعِدَّ</a:t>
@@ -49123,6 +49290,7 @@
                   <a:srgbClr val="D4AF37"/>
                 </a:solidFill>
                 <a:latin typeface="Amiri" pitchFamily="2" charset="-78"/>
+                <a:ea typeface="Amiri" pitchFamily="2" charset="-78"/>
                 <a:cs typeface="Amiri" pitchFamily="2" charset="-78"/>
               </a:rPr>
               <a:t>م</a:t>
@@ -49443,6 +49611,7 @@
                   <a:srgbClr val="8A6D1E"/>
                 </a:solidFill>
                 <a:latin typeface="Amiri" pitchFamily="2" charset="-78"/>
+                <a:ea typeface="Amiri" pitchFamily="2" charset="-78"/>
                 <a:cs typeface="Amiri" pitchFamily="2" charset="-78"/>
               </a:rPr>
               <a:t>اِبْدَأِ الآنَ</a:t>
@@ -49629,6 +49798,7 @@
                   <a:srgbClr val="1B3B6F"/>
                 </a:solidFill>
                 <a:latin typeface="Amiri" pitchFamily="2" charset="-78"/>
+                <a:ea typeface="Amiri" pitchFamily="2" charset="-78"/>
                 <a:cs typeface="Amiri" pitchFamily="2" charset="-78"/>
               </a:rPr>
               <a:t>فَهْمُ المَسْمُوعِ</a:t>
@@ -50093,6 +50263,7 @@
                   <a:srgbClr val="1B3B6F"/>
                 </a:solidFill>
                 <a:latin typeface="Amiri" pitchFamily="2" charset="-78"/>
+                <a:ea typeface="Amiri" pitchFamily="2" charset="-78"/>
                 <a:cs typeface="Amiri" pitchFamily="2" charset="-78"/>
               </a:rPr>
               <a:t>قَالَ</a:t>
@@ -50207,6 +50378,7 @@
                   <a:srgbClr val="1F2A37"/>
                 </a:solidFill>
                 <a:latin typeface="Amiri" pitchFamily="2" charset="-78"/>
+                <a:ea typeface="Amiri" pitchFamily="2" charset="-78"/>
                 <a:cs typeface="Amiri" pitchFamily="2" charset="-78"/>
               </a:rPr>
               <a:t>قُلْنَا</a:t>
@@ -50308,6 +50480,7 @@
                   <a:srgbClr val="1F2A37"/>
                 </a:solidFill>
                 <a:latin typeface="Amiri" pitchFamily="2" charset="-78"/>
+                <a:ea typeface="Amiri" pitchFamily="2" charset="-78"/>
                 <a:cs typeface="Amiri" pitchFamily="2" charset="-78"/>
               </a:rPr>
               <a:t>قَالْنَا</a:t>
@@ -50409,6 +50582,7 @@
                   <a:srgbClr val="1F2A37"/>
                 </a:solidFill>
                 <a:latin typeface="Amiri" pitchFamily="2" charset="-78"/>
+                <a:ea typeface="Amiri" pitchFamily="2" charset="-78"/>
                 <a:cs typeface="Amiri" pitchFamily="2" charset="-78"/>
               </a:rPr>
               <a:t>قَوَلْنَا</a:t>
@@ -50645,6 +50819,7 @@
                   <a:srgbClr val="1F2A37"/>
                 </a:solidFill>
                 <a:latin typeface="Amiri" pitchFamily="2" charset="-78"/>
+                <a:ea typeface="Amiri" pitchFamily="2" charset="-78"/>
                 <a:cs typeface="Amiri" pitchFamily="2" charset="-78"/>
               </a:rPr>
               <a:t>كَانَتْ شَاهَدَتْ</a:t>
@@ -50746,6 +50921,7 @@
                   <a:srgbClr val="1F2A37"/>
                 </a:solidFill>
                 <a:latin typeface="Amiri" pitchFamily="2" charset="-78"/>
+                <a:ea typeface="Amiri" pitchFamily="2" charset="-78"/>
                 <a:cs typeface="Amiri" pitchFamily="2" charset="-78"/>
               </a:rPr>
               <a:t>سَتُشَاهِدُ</a:t>
@@ -50847,6 +51023,7 @@
                   <a:srgbClr val="1F2A37"/>
                 </a:solidFill>
                 <a:latin typeface="Amiri" pitchFamily="2" charset="-78"/>
+                <a:ea typeface="Amiri" pitchFamily="2" charset="-78"/>
                 <a:cs typeface="Amiri" pitchFamily="2" charset="-78"/>
               </a:rPr>
               <a:t>كَانَتْ تُشَاهِدُ</a:t>
@@ -51083,6 +51260,7 @@
                   <a:srgbClr val="1F2A37"/>
                 </a:solidFill>
                 <a:latin typeface="Amiri" pitchFamily="2" charset="-78"/>
+                <a:ea typeface="Amiri" pitchFamily="2" charset="-78"/>
                 <a:cs typeface="Amiri" pitchFamily="2" charset="-78"/>
               </a:rPr>
               <a:t>أَلْعَبُ السِّبَاحَةَ مَرَّتَيْنِ فِي الأُسْبُوعِ.</a:t>
@@ -51184,6 +51362,7 @@
                   <a:srgbClr val="1F2A37"/>
                 </a:solidFill>
                 <a:latin typeface="Amiri" pitchFamily="2" charset="-78"/>
+                <a:ea typeface="Amiri" pitchFamily="2" charset="-78"/>
                 <a:cs typeface="Amiri" pitchFamily="2" charset="-78"/>
               </a:rPr>
               <a:t>أَعْزِفُ السِّبَاحَةَ مَرَّتَيْنِ فِي الأُسْبُوعِ.</a:t>
@@ -51285,6 +51464,7 @@
                   <a:srgbClr val="1F2A37"/>
                 </a:solidFill>
                 <a:latin typeface="Amiri" pitchFamily="2" charset="-78"/>
+                <a:ea typeface="Amiri" pitchFamily="2" charset="-78"/>
                 <a:cs typeface="Amiri" pitchFamily="2" charset="-78"/>
               </a:rPr>
               <a:t>أُمَارِسُ السِّبَاحَةَ مَرَّتَيْنِ فِي الأُسْبُوعِ.</a:t>
@@ -51521,6 +51701,7 @@
                   <a:srgbClr val="1F2A37"/>
                 </a:solidFill>
                 <a:latin typeface="Amiri" pitchFamily="2" charset="-78"/>
+                <a:ea typeface="Amiri" pitchFamily="2" charset="-78"/>
                 <a:cs typeface="Amiri" pitchFamily="2" charset="-78"/>
               </a:rPr>
               <a:t>فَجْأَةً بَدَأَ المَطَرُ، وَفِي المُسْتَقْبَلِ سَأَعُودُ.</a:t>
@@ -51622,6 +51803,7 @@
                   <a:srgbClr val="1F2A37"/>
                 </a:solidFill>
                 <a:latin typeface="Amiri" pitchFamily="2" charset="-78"/>
+                <a:ea typeface="Amiri" pitchFamily="2" charset="-78"/>
                 <a:cs typeface="Amiri" pitchFamily="2" charset="-78"/>
               </a:rPr>
               <a:t>فَجْأَةً بَدَأَ المَطَرُ، وَفِي المُسْتَقْبَلِ عُدْتُ.</a:t>
@@ -51723,6 +51905,7 @@
                   <a:srgbClr val="1F2A37"/>
                 </a:solidFill>
                 <a:latin typeface="Amiri" pitchFamily="2" charset="-78"/>
+                <a:ea typeface="Amiri" pitchFamily="2" charset="-78"/>
                 <a:cs typeface="Amiri" pitchFamily="2" charset="-78"/>
               </a:rPr>
               <a:t>فَجْأَةً سَيَبْدَأُ المَطَرُ، وَأَمْسِ عُدْتُ.</a:t>
@@ -52058,6 +52241,7 @@
                   <a:srgbClr val="D4AF37"/>
                 </a:solidFill>
                 <a:latin typeface="Amiri" pitchFamily="2" charset="-78"/>
+                <a:ea typeface="Amiri" pitchFamily="2" charset="-78"/>
                 <a:cs typeface="Amiri" pitchFamily="2" charset="-78"/>
               </a:rPr>
               <a:t>م</a:t>
@@ -52378,6 +52562,7 @@
                   <a:srgbClr val="8A6D1E"/>
                 </a:solidFill>
                 <a:latin typeface="Amiri" pitchFamily="2" charset="-78"/>
+                <a:ea typeface="Amiri" pitchFamily="2" charset="-78"/>
                 <a:cs typeface="Amiri" pitchFamily="2" charset="-78"/>
               </a:rPr>
               <a:t>الإِجَابَاتُ وَالتَّعْلِيلُ</a:t>
@@ -52564,6 +52749,7 @@
                   <a:srgbClr val="1B3B6F"/>
                 </a:solidFill>
                 <a:latin typeface="Amiri" pitchFamily="2" charset="-78"/>
+                <a:ea typeface="Amiri" pitchFamily="2" charset="-78"/>
                 <a:cs typeface="Amiri" pitchFamily="2" charset="-78"/>
               </a:rPr>
               <a:t>فَهْمُ المَسْمُوعِ</a:t>
@@ -53093,6 +53279,7 @@
                   <a:srgbClr val="1B3B6F"/>
                 </a:solidFill>
                 <a:latin typeface="Amiri" pitchFamily="2" charset="-78"/>
+                <a:ea typeface="Amiri" pitchFamily="2" charset="-78"/>
                 <a:cs typeface="Amiri" pitchFamily="2" charset="-78"/>
               </a:rPr>
               <a:t>قَالَ</a:t>
@@ -53234,6 +53421,7 @@
                   <a:srgbClr val="1F2A37"/>
                 </a:solidFill>
                 <a:latin typeface="Amiri" pitchFamily="2" charset="-78"/>
+                <a:ea typeface="Amiri" pitchFamily="2" charset="-78"/>
                 <a:cs typeface="Amiri" pitchFamily="2" charset="-78"/>
               </a:rPr>
               <a:t>قُلْنَا</a:t>
@@ -53335,6 +53523,7 @@
                   <a:srgbClr val="9AA1AB"/>
                 </a:solidFill>
                 <a:latin typeface="Amiri" pitchFamily="2" charset="-78"/>
+                <a:ea typeface="Amiri" pitchFamily="2" charset="-78"/>
                 <a:cs typeface="Amiri" pitchFamily="2" charset="-78"/>
               </a:rPr>
               <a:t>قَالْنَا</a:t>
@@ -53436,6 +53625,7 @@
                   <a:srgbClr val="9AA1AB"/>
                 </a:solidFill>
                 <a:latin typeface="Amiri" pitchFamily="2" charset="-78"/>
+                <a:ea typeface="Amiri" pitchFamily="2" charset="-78"/>
                 <a:cs typeface="Amiri" pitchFamily="2" charset="-78"/>
               </a:rPr>
               <a:t>قَوَلْنَا</a:t>
@@ -53710,6 +53900,7 @@
                   <a:srgbClr val="9AA1AB"/>
                 </a:solidFill>
                 <a:latin typeface="Amiri" pitchFamily="2" charset="-78"/>
+                <a:ea typeface="Amiri" pitchFamily="2" charset="-78"/>
                 <a:cs typeface="Amiri" pitchFamily="2" charset="-78"/>
               </a:rPr>
               <a:t>كَانَتْ شَاهَدَتْ</a:t>
@@ -53811,6 +54002,7 @@
                   <a:srgbClr val="9AA1AB"/>
                 </a:solidFill>
                 <a:latin typeface="Amiri" pitchFamily="2" charset="-78"/>
+                <a:ea typeface="Amiri" pitchFamily="2" charset="-78"/>
                 <a:cs typeface="Amiri" pitchFamily="2" charset="-78"/>
               </a:rPr>
               <a:t>سَتُشَاهِدُ</a:t>
@@ -53939,6 +54131,7 @@
                   <a:srgbClr val="1F2A37"/>
                 </a:solidFill>
                 <a:latin typeface="Amiri" pitchFamily="2" charset="-78"/>
+                <a:ea typeface="Amiri" pitchFamily="2" charset="-78"/>
                 <a:cs typeface="Amiri" pitchFamily="2" charset="-78"/>
               </a:rPr>
               <a:t>كَانَتْ تُشَاهِدُ</a:t>
@@ -54213,6 +54406,7 @@
                   <a:srgbClr val="9AA1AB"/>
                 </a:solidFill>
                 <a:latin typeface="Amiri" pitchFamily="2" charset="-78"/>
+                <a:ea typeface="Amiri" pitchFamily="2" charset="-78"/>
                 <a:cs typeface="Amiri" pitchFamily="2" charset="-78"/>
               </a:rPr>
               <a:t>أَلْعَبُ السِّبَاحَةَ مَرَّتَيْنِ فِي الأُسْبُوعِ.</a:t>
@@ -54314,6 +54508,7 @@
                   <a:srgbClr val="9AA1AB"/>
                 </a:solidFill>
                 <a:latin typeface="Amiri" pitchFamily="2" charset="-78"/>
+                <a:ea typeface="Amiri" pitchFamily="2" charset="-78"/>
                 <a:cs typeface="Amiri" pitchFamily="2" charset="-78"/>
               </a:rPr>
               <a:t>أَعْزِفُ السِّبَاحَةَ مَرَّتَيْنِ فِي الأُسْبُوعِ.</a:t>
@@ -54442,6 +54637,7 @@
                   <a:srgbClr val="1F2A37"/>
                 </a:solidFill>
                 <a:latin typeface="Amiri" pitchFamily="2" charset="-78"/>
+                <a:ea typeface="Amiri" pitchFamily="2" charset="-78"/>
                 <a:cs typeface="Amiri" pitchFamily="2" charset="-78"/>
               </a:rPr>
               <a:t>أُمَارِسُ السِّبَاحَةَ مَرَّتَيْنِ فِي الأُسْبُوعِ.</a:t>
@@ -54743,6 +54939,7 @@
                   <a:srgbClr val="1F2A37"/>
                 </a:solidFill>
                 <a:latin typeface="Amiri" pitchFamily="2" charset="-78"/>
+                <a:ea typeface="Amiri" pitchFamily="2" charset="-78"/>
                 <a:cs typeface="Amiri" pitchFamily="2" charset="-78"/>
               </a:rPr>
               <a:t>فَجْأَةً بَدَأَ المَطَرُ، وَفِي المُسْتَقْبَلِ سَأَعُودُ.</a:t>
@@ -54844,6 +55041,7 @@
                   <a:srgbClr val="9AA1AB"/>
                 </a:solidFill>
                 <a:latin typeface="Amiri" pitchFamily="2" charset="-78"/>
+                <a:ea typeface="Amiri" pitchFamily="2" charset="-78"/>
                 <a:cs typeface="Amiri" pitchFamily="2" charset="-78"/>
               </a:rPr>
               <a:t>فَجْأَةً بَدَأَ المَطَرُ، وَفِي المُسْتَقْبَلِ عُدْتُ.</a:t>
@@ -54945,6 +55143,7 @@
                   <a:srgbClr val="9AA1AB"/>
                 </a:solidFill>
                 <a:latin typeface="Amiri" pitchFamily="2" charset="-78"/>
+                <a:ea typeface="Amiri" pitchFamily="2" charset="-78"/>
                 <a:cs typeface="Amiri" pitchFamily="2" charset="-78"/>
               </a:rPr>
               <a:t>فَجْأَةً سَيَبْدَأُ المَطَرُ، وَأَمْسِ عُدْتُ.</a:t>
@@ -55134,6 +55333,7 @@
                   <a:srgbClr val="1B3B6F"/>
                 </a:solidFill>
                 <a:latin typeface="Amiri" pitchFamily="2" charset="-78"/>
+                <a:ea typeface="Amiri" pitchFamily="2" charset="-78"/>
                 <a:cs typeface="Amiri" pitchFamily="2" charset="-78"/>
               </a:rPr>
               <a:t>اللَّاحِقَةُ · الجَذْرُ الشَّاذُّ · كَانَ · التَّلَازُمُ · الزَّمَنُ</a:t>
@@ -55267,6 +55467,7 @@
                   <a:srgbClr val="D4AF37"/>
                 </a:solidFill>
                 <a:latin typeface="Amiri" pitchFamily="2" charset="-78"/>
+                <a:ea typeface="Amiri" pitchFamily="2" charset="-78"/>
                 <a:cs typeface="Amiri" pitchFamily="2" charset="-78"/>
               </a:rPr>
               <a:t>م</a:t>
@@ -55587,6 +55788,7 @@
                   <a:srgbClr val="8A6D1E"/>
                 </a:solidFill>
                 <a:latin typeface="Amiri" pitchFamily="2" charset="-78"/>
+                <a:ea typeface="Amiri" pitchFamily="2" charset="-78"/>
                 <a:cs typeface="Amiri" pitchFamily="2" charset="-78"/>
               </a:rPr>
               <a:t>مُرَاجَعَةُ القَوَاعِدِ</a:t>
@@ -55867,6 +56069,7 @@
                   <a:srgbClr val="1B3B6F"/>
                 </a:solidFill>
                 <a:latin typeface="Amiri" pitchFamily="2" charset="-78"/>
+                <a:ea typeface="Amiri" pitchFamily="2" charset="-78"/>
                 <a:cs typeface="Amiri" pitchFamily="2" charset="-78"/>
               </a:rPr>
               <a:t>لَعِبْتُ · رَسَمَتْ · ذَهَبُوا · شَاهَدْنَا</a:t>
@@ -56073,6 +56276,7 @@
                   <a:srgbClr val="1B3B6F"/>
                 </a:solidFill>
                 <a:latin typeface="Amiri" pitchFamily="2" charset="-78"/>
+                <a:ea typeface="Amiri" pitchFamily="2" charset="-78"/>
                 <a:cs typeface="Amiri" pitchFamily="2" charset="-78"/>
               </a:rPr>
               <a:t>قُلْنَا · زُرْتُ · مَشَيْنَا</a:t>
@@ -56279,6 +56483,7 @@
                   <a:srgbClr val="1B3B6F"/>
                 </a:solidFill>
                 <a:latin typeface="Amiri" pitchFamily="2" charset="-78"/>
+                <a:ea typeface="Amiri" pitchFamily="2" charset="-78"/>
                 <a:cs typeface="Amiri" pitchFamily="2" charset="-78"/>
               </a:rPr>
               <a:t>كَانَ الطَّقْسُ جَمِيلًا · كَانَتْ تُشَاهِدُ</a:t>
@@ -56420,6 +56625,7 @@
                   <a:srgbClr val="1B3B6F"/>
                 </a:solidFill>
                 <a:latin typeface="Amiri" pitchFamily="2" charset="-78"/>
+                <a:ea typeface="Amiri" pitchFamily="2" charset="-78"/>
                 <a:cs typeface="Amiri" pitchFamily="2" charset="-78"/>
               </a:rPr>
               <a:t>أُمَارِسُ السِّبَاحَةَ · فَازَ بِالبُطُولَةِ · أُعْجِبْتُ بِـ</a:t>
@@ -56561,6 +56767,7 @@
                   <a:srgbClr val="1B3B6F"/>
                 </a:solidFill>
                 <a:latin typeface="Amiri" pitchFamily="2" charset="-78"/>
+                <a:ea typeface="Amiri" pitchFamily="2" charset="-78"/>
                 <a:cs typeface="Amiri" pitchFamily="2" charset="-78"/>
               </a:rPr>
               <a:t>فَجْأَةً بَدَأَ … وَفِي المُسْتَقْبَلِ سَأَعُودُ</a:t>
@@ -56835,6 +57042,7 @@
                   <a:srgbClr val="D4AF37"/>
                 </a:solidFill>
                 <a:latin typeface="Amiri" pitchFamily="2" charset="-78"/>
+                <a:ea typeface="Amiri" pitchFamily="2" charset="-78"/>
                 <a:cs typeface="Amiri" pitchFamily="2" charset="-78"/>
               </a:rPr>
               <a:t>م</a:t>
@@ -57155,6 +57363,7 @@
                   <a:srgbClr val="8A6D1E"/>
                 </a:solidFill>
                 <a:latin typeface="Amiri" pitchFamily="2" charset="-78"/>
+                <a:ea typeface="Amiri" pitchFamily="2" charset="-78"/>
                 <a:cs typeface="Amiri" pitchFamily="2" charset="-78"/>
               </a:rPr>
               <a:t>خُطَّةُ التَّقْيِيمِ</a:t>
@@ -58289,6 +58498,7 @@
                   <a:srgbClr val="D4AF37"/>
                 </a:solidFill>
                 <a:latin typeface="Amiri" pitchFamily="2" charset="-78"/>
+                <a:ea typeface="Amiri" pitchFamily="2" charset="-78"/>
                 <a:cs typeface="Amiri" pitchFamily="2" charset="-78"/>
               </a:rPr>
               <a:t>م</a:t>
@@ -58609,6 +58819,7 @@
                   <a:srgbClr val="8A6D1E"/>
                 </a:solidFill>
                 <a:latin typeface="Amiri" pitchFamily="2" charset="-78"/>
+                <a:ea typeface="Amiri" pitchFamily="2" charset="-78"/>
                 <a:cs typeface="Amiri" pitchFamily="2" charset="-78"/>
               </a:rPr>
               <a:t>الاِسْتِمَاعُ</a:t>
@@ -60532,6 +60743,7 @@
                   <a:srgbClr val="D4AF37"/>
                 </a:solidFill>
                 <a:latin typeface="Amiri" pitchFamily="2" charset="-78"/>
+                <a:ea typeface="Amiri" pitchFamily="2" charset="-78"/>
                 <a:cs typeface="Amiri" pitchFamily="2" charset="-78"/>
               </a:rPr>
               <a:t>م</a:t>
@@ -60852,6 +61064,7 @@
                   <a:srgbClr val="8A6D1E"/>
                 </a:solidFill>
                 <a:latin typeface="Amiri" pitchFamily="2" charset="-78"/>
+                <a:ea typeface="Amiri" pitchFamily="2" charset="-78"/>
                 <a:cs typeface="Amiri" pitchFamily="2" charset="-78"/>
               </a:rPr>
               <a:t>الإِجَابَاتُ</a:t>
@@ -61393,6 +61606,7 @@
                   <a:srgbClr val="8A6D1E"/>
                 </a:solidFill>
                 <a:latin typeface="Amiri" pitchFamily="2" charset="-78"/>
+                <a:ea typeface="Amiri" pitchFamily="2" charset="-78"/>
                 <a:cs typeface="Amiri" pitchFamily="2" charset="-78"/>
               </a:rPr>
               <a:t>كُنْتُ أَلْعَبُ كُرَةَ الطَّائِرَةِ فِي نَادِي الحَيِّ.</a:t>
@@ -61896,6 +62110,7 @@
                   <a:srgbClr val="8A6D1E"/>
                 </a:solidFill>
                 <a:latin typeface="Amiri" pitchFamily="2" charset="-78"/>
+                <a:ea typeface="Amiri" pitchFamily="2" charset="-78"/>
                 <a:cs typeface="Amiri" pitchFamily="2" charset="-78"/>
               </a:rPr>
               <a:t>أَمَّا الآنَ فَأَتَدَرَّبُ عَادَةً ثَلَاثَ مَرَّاتٍ فِي الأُسْبُوعِ.</a:t>
@@ -62399,6 +62614,7 @@
                   <a:srgbClr val="8A6D1E"/>
                 </a:solidFill>
                 <a:latin typeface="Amiri" pitchFamily="2" charset="-78"/>
+                <a:ea typeface="Amiri" pitchFamily="2" charset="-78"/>
                 <a:cs typeface="Amiri" pitchFamily="2" charset="-78"/>
               </a:rPr>
               <a:t>وَالشَّهْرَ القَادِمَ سَأُشَارِكُ فِي بُطُولَةٍ إِقْلِيمِيَّةٍ.</a:t>
@@ -62902,6 +63118,7 @@
                   <a:srgbClr val="8A6D1E"/>
                 </a:solidFill>
                 <a:latin typeface="Amiri" pitchFamily="2" charset="-78"/>
+                <a:ea typeface="Amiri" pitchFamily="2" charset="-78"/>
                 <a:cs typeface="Amiri" pitchFamily="2" charset="-78"/>
               </a:rPr>
               <a:t>فُزْتُ بِالمِيدَالِيَةِ البُرُونْزِيَّةِ فِي بُطُولَةِ المَدَارِسِ.</a:t>
@@ -63000,13 +63217,9 @@
     <a:fontScheme name="Office">
       <a:majorFont>
         <a:latin typeface="Calibri Light" panose="020F0302020204030204"/>
-        <a:ea typeface=""/>
-        <a:cs typeface=""/>
-        <a:font script="Jpan" typeface="游ゴシック Light"/>
-        <a:font script="Hang" typeface="맑은 고딕"/>
-        <a:font script="Hans" typeface="等线 Light"/>
-        <a:font script="Hant" typeface="新細明體"/>
-        <a:font script="Arab" typeface="Times New Roman"/>
+        <a:ea typeface="Amiri" pitchFamily="2" charset="-78"/>
+        <a:cs typeface="Amiri" pitchFamily="2" charset="-78"/>
+        <a:font script="Arab" typeface="Amiri"/>
         <a:font script="Hebr" typeface="Times New Roman"/>
         <a:font script="Thai" typeface="Angsana New"/>
         <a:font script="Ethi" typeface="Nyala"/>
@@ -63052,13 +63265,9 @@
       </a:majorFont>
       <a:minorFont>
         <a:latin typeface="Calibri" panose="020F0502020204030204"/>
-        <a:ea typeface=""/>
-        <a:cs typeface=""/>
-        <a:font script="Jpan" typeface="游ゴシック"/>
-        <a:font script="Hang" typeface="맑은 고딕"/>
-        <a:font script="Hans" typeface="等线"/>
-        <a:font script="Hant" typeface="新細明體"/>
-        <a:font script="Arab" typeface="Arial"/>
+        <a:ea typeface="Amiri" pitchFamily="2" charset="-78"/>
+        <a:cs typeface="Amiri" pitchFamily="2" charset="-78"/>
+        <a:font script="Arab" typeface="Amiri"/>
         <a:font script="Hebr" typeface="Arial"/>
         <a:font script="Thai" typeface="Cordia New"/>
         <a:font script="Ethi" typeface="Nyala"/>
